--- a/promo/dl/proposal/bookie-proposal-summary-1p.pptx
+++ b/promo/dl/proposal/bookie-proposal-summary-1p.pptx
@@ -3057,7 +3057,7 @@
                   <a:srgbClr val="F2D58A"/>
                 </a:solidFill>
                 <a:latin typeface="Pretendard ExtraBold" pitchFamily="34" charset="0"/>
-                <a:ea typeface="Pretendard ExtraBold" pitchFamily="34" charset="-127"/>
+                <a:ea typeface="Pretendard ExtraBold" pitchFamily="34" charset="-122"/>
                 <a:cs typeface="Pretendard ExtraBold" pitchFamily="34" charset="-120"/>
               </a:rPr>
               <a:t>통합운영 제안서 한 장 요약</a:t>
@@ -3099,7 +3099,7 @@
                   <a:srgbClr val="C9D6CC"/>
                 </a:solidFill>
                 <a:latin typeface="Noto Serif KR" pitchFamily="34" charset="0"/>
-                <a:ea typeface="Noto Serif KR" pitchFamily="34" charset="-127"/>
+                <a:ea typeface="Noto Serif KR" pitchFamily="34" charset="-122"/>
                 <a:cs typeface="Noto Serif KR" pitchFamily="34" charset="-120"/>
               </a:rPr>
               <a:t>bookie</a:t>
@@ -3141,7 +3141,7 @@
                   <a:srgbClr val="FFFFFF"/>
                 </a:solidFill>
                 <a:latin typeface="Noto Serif KR" pitchFamily="34" charset="0"/>
-                <a:ea typeface="Noto Serif KR" pitchFamily="34" charset="-127"/>
+                <a:ea typeface="Noto Serif KR" pitchFamily="34" charset="-122"/>
                 <a:cs typeface="Noto Serif KR" pitchFamily="34" charset="-120"/>
               </a:rPr>
               <a:t>부기</a:t>
@@ -3183,7 +3183,7 @@
                   <a:srgbClr val="C9D6CC"/>
                 </a:solidFill>
                 <a:latin typeface="Pretendard" pitchFamily="34" charset="0"/>
-                <a:ea typeface="Pretendard" pitchFamily="34" charset="-127"/>
+                <a:ea typeface="Pretendard" pitchFamily="34" charset="-122"/>
                 <a:cs typeface="Pretendard" pitchFamily="34" charset="-120"/>
               </a:rPr>
               <a:t>초등 독서교육 플랫폼 부기(BOOKIE) 기반</a:t>
@@ -3225,7 +3225,7 @@
                   <a:srgbClr val="C9D6CC"/>
                 </a:solidFill>
                 <a:latin typeface="Pretendard" pitchFamily="34" charset="0"/>
-                <a:ea typeface="Pretendard" pitchFamily="34" charset="-127"/>
+                <a:ea typeface="Pretendard" pitchFamily="34" charset="-122"/>
                 <a:cs typeface="Pretendard" pitchFamily="34" charset="-120"/>
               </a:rPr>
               <a:t>2026. 10.</a:t>
@@ -3267,7 +3267,7 @@
                   <a:srgbClr val="FFFFFF"/>
                 </a:solidFill>
                 <a:latin typeface="Noto Serif KR Black" pitchFamily="34" charset="0"/>
-                <a:ea typeface="Noto Serif KR Black" pitchFamily="34" charset="-127"/>
+                <a:ea typeface="Noto Serif KR Black" pitchFamily="34" charset="-122"/>
                 <a:cs typeface="Noto Serif KR Black" pitchFamily="34" charset="-120"/>
               </a:rPr>
               <a:t>책과 이야기하며</a:t>
@@ -3287,7 +3287,7 @@
                   <a:srgbClr val="F2D58A"/>
                 </a:solidFill>
                 <a:latin typeface="Noto Serif KR Black" pitchFamily="34" charset="0"/>
-                <a:ea typeface="Noto Serif KR Black" pitchFamily="34" charset="-127"/>
+                <a:ea typeface="Noto Serif KR Black" pitchFamily="34" charset="-122"/>
                 <a:cs typeface="Noto Serif KR Black" pitchFamily="34" charset="-120"/>
               </a:rPr>
               <a:t>스스로 생각하는 아이로</a:t>
@@ -3329,10 +3329,10 @@
                   <a:srgbClr val="E3EBE5"/>
                 </a:solidFill>
                 <a:latin typeface="Pretendard" pitchFamily="34" charset="0"/>
-                <a:ea typeface="Pretendard" pitchFamily="34" charset="-127"/>
-                <a:cs typeface="Pretendard" pitchFamily="34" charset="-120"/>
-              </a:rPr>
-              <a:t>독서로 교실의 문제를 풀고 문해력, 사고력, 공감을 키우는 독서교육을 제안합니다.</a:t>
+                <a:ea typeface="Pretendard" pitchFamily="34" charset="-122"/>
+                <a:cs typeface="Pretendard" pitchFamily="34" charset="-120"/>
+              </a:rPr>
+              <a:t>AI의 답을 읽고 판단할 바탕은 학생이 직접 읽고 생각한 시간에서 자랍니다.</a:t>
             </a:r>
             <a:endParaRPr lang="en-US" sz="889" dirty="0"/>
           </a:p>
@@ -3344,32 +3344,15 @@
               <a:buNone/>
             </a:pPr>
             <a:r>
-              <a:rPr lang="ko-KR" altLang="en-US" sz="889" b="1" spc="4" kern="0" dirty="0">
-                <a:solidFill>
-                  <a:srgbClr val="FFFFFF"/>
-                </a:solidFill>
-                <a:latin typeface="Pretendard" pitchFamily="34" charset="0"/>
-                <a:ea typeface="Pretendard" pitchFamily="34" charset="-127"/>
-                <a:cs typeface="Pretendard" pitchFamily="34" charset="-120"/>
-              </a:rPr>
-              <a:t>부기 플랫폼, 교원 연수, 운영지원, 성과보고</a:t>
-            </a:r>
-            <a:pPr algn="l" indent="0" marL="0">
-              <a:lnSpc>
-                <a:spcPts val="1350"/>
-              </a:lnSpc>
-              <a:buNone/>
-            </a:pPr>
-            <a:r>
               <a:rPr lang="ko-KR" altLang="en-US" sz="889" spc="4" kern="0" dirty="0">
                 <a:solidFill>
                   <a:srgbClr val="E3EBE5"/>
                 </a:solidFill>
                 <a:latin typeface="Pretendard" pitchFamily="34" charset="0"/>
-                <a:ea typeface="Pretendard" pitchFamily="34" charset="-127"/>
-                <a:cs typeface="Pretendard" pitchFamily="34" charset="-120"/>
-              </a:rPr>
-              <a:t>를 한 사업으로 묶어 학교마다 독서수업이 자리 잡도록 돕습니다.</a:t>
+                <a:ea typeface="Pretendard" pitchFamily="34" charset="-122"/>
+                <a:cs typeface="Pretendard" pitchFamily="34" charset="-120"/>
+              </a:rPr>
+              <a:t>낯선 어휘에서 멈추지 않도록 돕고, 우리 반의 문제를 책 속 인물과 질문에 연결하는 독서수업을 제안합니다.</a:t>
             </a:r>
             <a:endParaRPr lang="en-US" sz="889" dirty="0"/>
           </a:p>
@@ -3408,7 +3391,7 @@
                   <a:srgbClr val="FFFFFF"/>
                 </a:solidFill>
                 <a:latin typeface="Pretendard" pitchFamily="34" charset="0"/>
-                <a:ea typeface="Pretendard" pitchFamily="34" charset="-127"/>
+                <a:ea typeface="Pretendard" pitchFamily="34" charset="-122"/>
                 <a:cs typeface="Pretendard" pitchFamily="34" charset="-120"/>
               </a:rPr>
               <a:t>1</a:t>
@@ -3450,7 +3433,7 @@
                   <a:srgbClr val="FFFFFF"/>
                 </a:solidFill>
                 <a:latin typeface="Pretendard" pitchFamily="34" charset="0"/>
-                <a:ea typeface="Pretendard" pitchFamily="34" charset="-127"/>
+                <a:ea typeface="Pretendard" pitchFamily="34" charset="-122"/>
                 <a:cs typeface="Pretendard" pitchFamily="34" charset="-120"/>
               </a:rPr>
               <a:t>2</a:t>
@@ -3492,7 +3475,7 @@
                   <a:srgbClr val="1D3A2A"/>
                 </a:solidFill>
                 <a:latin typeface="Pretendard ExtraBold" pitchFamily="34" charset="0"/>
-                <a:ea typeface="Pretendard ExtraBold" pitchFamily="34" charset="-127"/>
+                <a:ea typeface="Pretendard ExtraBold" pitchFamily="34" charset="-122"/>
                 <a:cs typeface="Pretendard ExtraBold" pitchFamily="34" charset="-120"/>
               </a:rPr>
               <a:t>사업 개요</a:t>
@@ -3534,7 +3517,7 @@
                   <a:srgbClr val="1D3A2A"/>
                 </a:solidFill>
                 <a:latin typeface="Pretendard ExtraBold" pitchFamily="34" charset="0"/>
-                <a:ea typeface="Pretendard ExtraBold" pitchFamily="34" charset="-127"/>
+                <a:ea typeface="Pretendard ExtraBold" pitchFamily="34" charset="-122"/>
                 <a:cs typeface="Pretendard ExtraBold" pitchFamily="34" charset="-120"/>
               </a:rPr>
               <a:t>제안 배경</a:t>
@@ -3576,7 +3559,7 @@
                   <a:srgbClr val="F6ECD2"/>
                 </a:solidFill>
                 <a:latin typeface="Pretendard" pitchFamily="34" charset="0"/>
-                <a:ea typeface="Pretendard" pitchFamily="34" charset="-127"/>
+                <a:ea typeface="Pretendard" pitchFamily="34" charset="-122"/>
                 <a:cs typeface="Pretendard" pitchFamily="34" charset="-120"/>
               </a:rPr>
               <a:t>사업명</a:t>
@@ -3618,7 +3601,7 @@
                   <a:srgbClr val="24302A"/>
                 </a:solidFill>
                 <a:latin typeface="Pretendard" pitchFamily="34" charset="0"/>
-                <a:ea typeface="Pretendard" pitchFamily="34" charset="-127"/>
+                <a:ea typeface="Pretendard" pitchFamily="34" charset="-122"/>
                 <a:cs typeface="Pretendard" pitchFamily="34" charset="-120"/>
               </a:rPr>
               <a:t>초등 디지털 독서교육 플랫폼 기반 온라인 독서교육 통합운영 사업</a:t>
@@ -3660,7 +3643,7 @@
                   <a:srgbClr val="B5452F"/>
                 </a:solidFill>
                 <a:latin typeface="Pretendard ExtraBold" pitchFamily="34" charset="0"/>
-                <a:ea typeface="Pretendard ExtraBold" pitchFamily="34" charset="-127"/>
+                <a:ea typeface="Pretendard ExtraBold" pitchFamily="34" charset="-122"/>
                 <a:cs typeface="Pretendard ExtraBold" pitchFamily="34" charset="-120"/>
               </a:rPr>
               <a:t>17.8</a:t>
@@ -3677,7 +3660,7 @@
                   <a:srgbClr val="B5452F"/>
                 </a:solidFill>
                 <a:latin typeface="Pretendard" pitchFamily="34" charset="0"/>
-                <a:ea typeface="Pretendard" pitchFamily="34" charset="-127"/>
+                <a:ea typeface="Pretendard" pitchFamily="34" charset="-122"/>
                 <a:cs typeface="Pretendard" pitchFamily="34" charset="-120"/>
               </a:rPr>
               <a:t>%</a:t>
@@ -3719,7 +3702,7 @@
                   <a:srgbClr val="1D3A2A"/>
                 </a:solidFill>
                 <a:latin typeface="Pretendard ExtraBold" pitchFamily="34" charset="0"/>
-                <a:ea typeface="Pretendard ExtraBold" pitchFamily="34" charset="-127"/>
+                <a:ea typeface="Pretendard ExtraBold" pitchFamily="34" charset="-122"/>
                 <a:cs typeface="Pretendard ExtraBold" pitchFamily="34" charset="-120"/>
               </a:rPr>
               <a:t>91.8</a:t>
@@ -3736,7 +3719,7 @@
                   <a:srgbClr val="1D3A2A"/>
                 </a:solidFill>
                 <a:latin typeface="Pretendard" pitchFamily="34" charset="0"/>
-                <a:ea typeface="Pretendard" pitchFamily="34" charset="-127"/>
+                <a:ea typeface="Pretendard" pitchFamily="34" charset="-122"/>
                 <a:cs typeface="Pretendard" pitchFamily="34" charset="-120"/>
               </a:rPr>
               <a:t>%</a:t>
@@ -3778,7 +3761,7 @@
                   <a:srgbClr val="4C574F"/>
                 </a:solidFill>
                 <a:latin typeface="Pretendard" pitchFamily="34" charset="0"/>
-                <a:ea typeface="Pretendard" pitchFamily="34" charset="-127"/>
+                <a:ea typeface="Pretendard" pitchFamily="34" charset="-122"/>
                 <a:cs typeface="Pretendard" pitchFamily="34" charset="-120"/>
               </a:rPr>
               <a:t>읽기 기초 수준 미달 학생</a:t>
@@ -3798,7 +3781,7 @@
                   <a:srgbClr val="4C574F"/>
                 </a:solidFill>
                 <a:latin typeface="Pretendard" pitchFamily="34" charset="0"/>
-                <a:ea typeface="Pretendard" pitchFamily="34" charset="-127"/>
+                <a:ea typeface="Pretendard" pitchFamily="34" charset="-122"/>
                 <a:cs typeface="Pretendard" pitchFamily="34" charset="-120"/>
               </a:rPr>
               <a:t>PISA 2025(2022년 14.7%)</a:t>
@@ -3840,7 +3823,7 @@
                   <a:srgbClr val="4C574F"/>
                 </a:solidFill>
                 <a:latin typeface="Pretendard" pitchFamily="34" charset="0"/>
-                <a:ea typeface="Pretendard" pitchFamily="34" charset="-127"/>
+                <a:ea typeface="Pretendard" pitchFamily="34" charset="-122"/>
                 <a:cs typeface="Pretendard" pitchFamily="34" charset="-120"/>
               </a:rPr>
               <a:t>학생 문해력이 떨어졌다고</a:t>
@@ -3860,7 +3843,7 @@
                   <a:srgbClr val="4C574F"/>
                 </a:solidFill>
                 <a:latin typeface="Pretendard" pitchFamily="34" charset="0"/>
-                <a:ea typeface="Pretendard" pitchFamily="34" charset="-127"/>
+                <a:ea typeface="Pretendard" pitchFamily="34" charset="-122"/>
                 <a:cs typeface="Pretendard" pitchFamily="34" charset="-120"/>
               </a:rPr>
               <a:t>답한 교원(2024)</a:t>
@@ -3902,7 +3885,7 @@
                   <a:srgbClr val="24302A"/>
                 </a:solidFill>
                 <a:latin typeface="Pretendard" pitchFamily="34" charset="0"/>
-                <a:ea typeface="Pretendard" pitchFamily="34" charset="-127"/>
+                <a:ea typeface="Pretendard" pitchFamily="34" charset="-122"/>
                 <a:cs typeface="Pretendard" pitchFamily="34" charset="-120"/>
               </a:rPr>
               <a:t>교육청이 선정한 참여 초등학교 1~6학년 학생과 담당 교원</a:t>
@@ -3944,7 +3927,7 @@
                   <a:srgbClr val="F6ECD2"/>
                 </a:solidFill>
                 <a:latin typeface="Pretendard" pitchFamily="34" charset="0"/>
-                <a:ea typeface="Pretendard" pitchFamily="34" charset="-127"/>
+                <a:ea typeface="Pretendard" pitchFamily="34" charset="-122"/>
                 <a:cs typeface="Pretendard" pitchFamily="34" charset="-120"/>
               </a:rPr>
               <a:t>사업 대상</a:t>
@@ -3986,7 +3969,7 @@
                   <a:srgbClr val="24302A"/>
                 </a:solidFill>
                 <a:latin typeface="Pretendard" pitchFamily="34" charset="0"/>
-                <a:ea typeface="Pretendard" pitchFamily="34" charset="-127"/>
+                <a:ea typeface="Pretendard" pitchFamily="34" charset="-122"/>
                 <a:cs typeface="Pretendard" pitchFamily="34" charset="-120"/>
               </a:rPr>
               <a:t>부기 300권과 차시 자료, 어휘력 진단, 교원 연수, 운영지원, 성과 보고</a:t>
@@ -4028,7 +4011,7 @@
                   <a:srgbClr val="F6ECD2"/>
                 </a:solidFill>
                 <a:latin typeface="Pretendard" pitchFamily="34" charset="0"/>
-                <a:ea typeface="Pretendard" pitchFamily="34" charset="-127"/>
+                <a:ea typeface="Pretendard" pitchFamily="34" charset="-122"/>
                 <a:cs typeface="Pretendard" pitchFamily="34" charset="-120"/>
               </a:rPr>
               <a:t>제공 내용</a:t>
@@ -4070,7 +4053,7 @@
                   <a:srgbClr val="24302A"/>
                 </a:solidFill>
                 <a:latin typeface="Pretendard" pitchFamily="34" charset="0"/>
-                <a:ea typeface="Pretendard" pitchFamily="34" charset="-127"/>
+                <a:ea typeface="Pretendard" pitchFamily="34" charset="-122"/>
                 <a:cs typeface="Pretendard" pitchFamily="34" charset="-120"/>
               </a:rPr>
               <a:t>플랫폼 운영형 또는 교육강사가 찾아가는 위탁 운영형 가운데 고름</a:t>
@@ -4112,7 +4095,7 @@
                   <a:srgbClr val="F6ECD2"/>
                 </a:solidFill>
                 <a:latin typeface="Pretendard" pitchFamily="34" charset="0"/>
-                <a:ea typeface="Pretendard" pitchFamily="34" charset="-127"/>
+                <a:ea typeface="Pretendard" pitchFamily="34" charset="-122"/>
                 <a:cs typeface="Pretendard" pitchFamily="34" charset="-120"/>
               </a:rPr>
               <a:t>운영 방식</a:t>
@@ -4154,7 +4137,7 @@
                   <a:srgbClr val="B5452F"/>
                 </a:solidFill>
                 <a:latin typeface="Pretendard ExtraBold" pitchFamily="34" charset="0"/>
-                <a:ea typeface="Pretendard ExtraBold" pitchFamily="34" charset="-127"/>
+                <a:ea typeface="Pretendard ExtraBold" pitchFamily="34" charset="-122"/>
                 <a:cs typeface="Pretendard ExtraBold" pitchFamily="34" charset="-120"/>
               </a:rPr>
               <a:t>44.4</a:t>
@@ -4171,7 +4154,7 @@
                   <a:srgbClr val="B5452F"/>
                 </a:solidFill>
                 <a:latin typeface="Pretendard" pitchFamily="34" charset="0"/>
-                <a:ea typeface="Pretendard" pitchFamily="34" charset="-127"/>
+                <a:ea typeface="Pretendard" pitchFamily="34" charset="-122"/>
                 <a:cs typeface="Pretendard" pitchFamily="34" charset="-120"/>
               </a:rPr>
               <a:t>%</a:t>
@@ -4213,27 +4196,10 @@
                   <a:srgbClr val="2E7A4E"/>
                 </a:solidFill>
                 <a:latin typeface="Pretendard ExtraBold" pitchFamily="34" charset="0"/>
-                <a:ea typeface="Pretendard ExtraBold" pitchFamily="34" charset="-127"/>
+                <a:ea typeface="Pretendard ExtraBold" pitchFamily="34" charset="-122"/>
                 <a:cs typeface="Pretendard ExtraBold" pitchFamily="34" charset="-120"/>
               </a:rPr>
-              <a:t>253.6</a:t>
-            </a:r>
-            <a:pPr algn="l" indent="0" marL="0">
-              <a:lnSpc>
-                <a:spcPts val="2014"/>
-              </a:lnSpc>
-              <a:buNone/>
-            </a:pPr>
-            <a:r>
-              <a:rPr lang="ko-KR" altLang="en-US" sz="840" b="1" spc="-32" kern="0" dirty="0">
-                <a:solidFill>
-                  <a:srgbClr val="2E7A4E"/>
-                </a:solidFill>
-                <a:latin typeface="Pretendard" pitchFamily="34" charset="0"/>
-                <a:ea typeface="Pretendard" pitchFamily="34" charset="-127"/>
-                <a:cs typeface="Pretendard" pitchFamily="34" charset="-120"/>
-              </a:rPr>
-              <a:t>억 원</a:t>
+              <a:t>함께 읽기</a:t>
             </a:r>
             <a:endParaRPr lang="en-US" sz="1549" dirty="0"/>
           </a:p>
@@ -4272,7 +4238,7 @@
                   <a:srgbClr val="4C574F"/>
                 </a:solidFill>
                 <a:latin typeface="Pretendard" pitchFamily="34" charset="0"/>
-                <a:ea typeface="Pretendard" pitchFamily="34" charset="-127"/>
+                <a:ea typeface="Pretendard" pitchFamily="34" charset="-122"/>
                 <a:cs typeface="Pretendard" pitchFamily="34" charset="-120"/>
               </a:rPr>
               <a:t>초등학생 독서 긍정 인식</a:t>
@@ -4292,7 +4258,7 @@
                   <a:srgbClr val="4C574F"/>
                 </a:solidFill>
                 <a:latin typeface="Pretendard" pitchFamily="34" charset="0"/>
-                <a:ea typeface="Pretendard" pitchFamily="34" charset="-127"/>
+                <a:ea typeface="Pretendard" pitchFamily="34" charset="-122"/>
                 <a:cs typeface="Pretendard" pitchFamily="34" charset="-120"/>
               </a:rPr>
               <a:t>(2023, 4년 사이 6.9%p 하락)</a:t>
@@ -4334,10 +4300,10 @@
                   <a:srgbClr val="4C574F"/>
                 </a:solidFill>
                 <a:latin typeface="Pretendard" pitchFamily="34" charset="0"/>
-                <a:ea typeface="Pretendard" pitchFamily="34" charset="-127"/>
-                <a:cs typeface="Pretendard" pitchFamily="34" charset="-120"/>
-              </a:rPr>
-              <a:t>2027년 교육부 독서교육</a:t>
+                <a:ea typeface="Pretendard" pitchFamily="34" charset="-122"/>
+                <a:cs typeface="Pretendard" pitchFamily="34" charset="-120"/>
+              </a:rPr>
+              <a:t>낱말 뜻, 인물 대화, 독후 표현</a:t>
             </a:r>
             <a:endParaRPr lang="en-US" sz="760" dirty="0"/>
           </a:p>
@@ -4354,10 +4320,10 @@
                   <a:srgbClr val="4C574F"/>
                 </a:solidFill>
                 <a:latin typeface="Pretendard" pitchFamily="34" charset="0"/>
-                <a:ea typeface="Pretendard" pitchFamily="34" charset="-127"/>
-                <a:cs typeface="Pretendard" pitchFamily="34" charset="-120"/>
-              </a:rPr>
-              <a:t>예산(안), 2026년의 1.9배</a:t>
+                <a:ea typeface="Pretendard" pitchFamily="34" charset="-122"/>
+                <a:cs typeface="Pretendard" pitchFamily="34" charset="-120"/>
+              </a:rPr>
+              <a:t>우리 반의 질문으로 연결</a:t>
             </a:r>
             <a:endParaRPr lang="en-US" sz="760" dirty="0"/>
           </a:p>
@@ -4396,7 +4362,7 @@
                   <a:srgbClr val="24302A"/>
                 </a:solidFill>
                 <a:latin typeface="Pretendard" pitchFamily="34" charset="0"/>
-                <a:ea typeface="Pretendard" pitchFamily="34" charset="-127"/>
+                <a:ea typeface="Pretendard" pitchFamily="34" charset="-122"/>
                 <a:cs typeface="Pretendard" pitchFamily="34" charset="-120"/>
               </a:rPr>
               <a:t>학급 규모 4개 구간 차등, </a:t>
@@ -4413,7 +4379,7 @@
                   <a:srgbClr val="2E7A4E"/>
                 </a:solidFill>
                 <a:latin typeface="Pretendard" pitchFamily="34" charset="0"/>
-                <a:ea typeface="Pretendard" pitchFamily="34" charset="-127"/>
+                <a:ea typeface="Pretendard" pitchFamily="34" charset="-122"/>
                 <a:cs typeface="Pretendard" pitchFamily="34" charset="-120"/>
               </a:rPr>
               <a:t>학교당 연 500만~2,000만 원(안)</a:t>
@@ -4455,7 +4421,7 @@
                   <a:srgbClr val="F6ECD2"/>
                 </a:solidFill>
                 <a:latin typeface="Pretendard" pitchFamily="34" charset="0"/>
-                <a:ea typeface="Pretendard" pitchFamily="34" charset="-127"/>
+                <a:ea typeface="Pretendard" pitchFamily="34" charset="-122"/>
                 <a:cs typeface="Pretendard" pitchFamily="34" charset="-120"/>
               </a:rPr>
               <a:t>사업비</a:t>
@@ -4497,7 +4463,7 @@
                   <a:srgbClr val="FFFFFF"/>
                 </a:solidFill>
                 <a:latin typeface="Pretendard" pitchFamily="34" charset="0"/>
-                <a:ea typeface="Pretendard" pitchFamily="34" charset="-127"/>
+                <a:ea typeface="Pretendard" pitchFamily="34" charset="-122"/>
                 <a:cs typeface="Pretendard" pitchFamily="34" charset="-120"/>
               </a:rPr>
               <a:t>3</a:t>
@@ -4539,7 +4505,7 @@
                   <a:srgbClr val="1D3A2A"/>
                 </a:solidFill>
                 <a:latin typeface="Pretendard ExtraBold" pitchFamily="34" charset="0"/>
-                <a:ea typeface="Pretendard ExtraBold" pitchFamily="34" charset="-127"/>
+                <a:ea typeface="Pretendard ExtraBold" pitchFamily="34" charset="-122"/>
                 <a:cs typeface="Pretendard ExtraBold" pitchFamily="34" charset="-120"/>
               </a:rPr>
               <a:t>부기 도입 효과</a:t>
@@ -4581,7 +4547,7 @@
                   <a:srgbClr val="FFFFFF"/>
                 </a:solidFill>
                 <a:latin typeface="Pretendard ExtraBold" pitchFamily="34" charset="0"/>
-                <a:ea typeface="Pretendard ExtraBold" pitchFamily="34" charset="-127"/>
+                <a:ea typeface="Pretendard ExtraBold" pitchFamily="34" charset="-122"/>
                 <a:cs typeface="Pretendard ExtraBold" pitchFamily="34" charset="-120"/>
               </a:rPr>
               <a:t>학생</a:t>
@@ -4623,7 +4589,7 @@
                   <a:srgbClr val="FFFFFF"/>
                 </a:solidFill>
                 <a:latin typeface="Pretendard ExtraBold" pitchFamily="34" charset="0"/>
-                <a:ea typeface="Pretendard ExtraBold" pitchFamily="34" charset="-127"/>
+                <a:ea typeface="Pretendard ExtraBold" pitchFamily="34" charset="-122"/>
                 <a:cs typeface="Pretendard ExtraBold" pitchFamily="34" charset="-120"/>
               </a:rPr>
               <a:t>교사</a:t>
@@ -4665,7 +4631,7 @@
                   <a:srgbClr val="FFFFFF"/>
                 </a:solidFill>
                 <a:latin typeface="Pretendard ExtraBold" pitchFamily="34" charset="0"/>
-                <a:ea typeface="Pretendard ExtraBold" pitchFamily="34" charset="-127"/>
+                <a:ea typeface="Pretendard ExtraBold" pitchFamily="34" charset="-122"/>
                 <a:cs typeface="Pretendard ExtraBold" pitchFamily="34" charset="-120"/>
               </a:rPr>
               <a:t>학교와 교육청</a:t>
@@ -4707,7 +4673,7 @@
                   <a:srgbClr val="4C574F"/>
                 </a:solidFill>
                 <a:latin typeface="Pretendard" pitchFamily="34" charset="0"/>
-                <a:ea typeface="Pretendard" pitchFamily="34" charset="-127"/>
+                <a:ea typeface="Pretendard" pitchFamily="34" charset="-122"/>
                 <a:cs typeface="Pretendard" pitchFamily="34" charset="-120"/>
               </a:rPr>
               <a:t>모르는 낱말을 눌러 뜻을 보며 </a:t>
@@ -4724,7 +4690,7 @@
                   <a:srgbClr val="24302A"/>
                 </a:solidFill>
                 <a:latin typeface="Pretendard" pitchFamily="34" charset="0"/>
-                <a:ea typeface="Pretendard" pitchFamily="34" charset="-127"/>
+                <a:ea typeface="Pretendard" pitchFamily="34" charset="-122"/>
                 <a:cs typeface="Pretendard" pitchFamily="34" charset="-120"/>
               </a:rPr>
               <a:t>학년별 50권, 모두</a:t>
@@ -4744,7 +4710,7 @@
                   <a:srgbClr val="24302A"/>
                 </a:solidFill>
                 <a:latin typeface="Pretendard" pitchFamily="34" charset="0"/>
-                <a:ea typeface="Pretendard" pitchFamily="34" charset="-127"/>
+                <a:ea typeface="Pretendard" pitchFamily="34" charset="-122"/>
                 <a:cs typeface="Pretendard" pitchFamily="34" charset="-120"/>
               </a:rPr>
               <a:t>300권</a:t>
@@ -4761,7 +4727,7 @@
                   <a:srgbClr val="4C574F"/>
                 </a:solidFill>
                 <a:latin typeface="Pretendard" pitchFamily="34" charset="0"/>
-                <a:ea typeface="Pretendard" pitchFamily="34" charset="-127"/>
+                <a:ea typeface="Pretendard" pitchFamily="34" charset="-122"/>
                 <a:cs typeface="Pretendard" pitchFamily="34" charset="-120"/>
               </a:rPr>
               <a:t>을 읽습니다.</a:t>
@@ -4803,11 +4769,14 @@
                   <a:srgbClr val="24302A"/>
                 </a:solidFill>
                 <a:latin typeface="Pretendard" pitchFamily="34" charset="0"/>
-                <a:ea typeface="Pretendard" pitchFamily="34" charset="-127"/>
-                <a:cs typeface="Pretendard" pitchFamily="34" charset="-120"/>
-              </a:rPr>
-              <a:t>온책읽기 10차시, 국어 4차시, 아침활동 5차시</a:t>
-            </a:r>
+                <a:ea typeface="Pretendard" pitchFamily="34" charset="-122"/>
+                <a:cs typeface="Pretendard" pitchFamily="34" charset="-120"/>
+              </a:rPr>
+              <a:t>학급 고민에 맞는 책과 질문을 고릅니다.</a:t>
+            </a:r>
+            <a:endParaRPr lang="en-US" sz="780" dirty="0"/>
+          </a:p>
+          <a:p>
             <a:pPr algn="l" indent="0" marL="0">
               <a:lnSpc>
                 <a:spcPts val="1125"/>
@@ -4815,15 +4784,15 @@
               <a:buNone/>
             </a:pPr>
             <a:r>
-              <a:rPr lang="ko-KR" altLang="en-US" sz="780" dirty="0">
-                <a:solidFill>
-                  <a:srgbClr val="4C574F"/>
-                </a:solidFill>
-                <a:latin typeface="Pretendard" pitchFamily="34" charset="0"/>
-                <a:ea typeface="Pretendard" pitchFamily="34" charset="-127"/>
-                <a:cs typeface="Pretendard" pitchFamily="34" charset="-120"/>
-              </a:rPr>
-              <a:t>의</a:t>
+              <a:rPr lang="ko-KR" altLang="en-US" sz="780" b="1" dirty="0">
+                <a:solidFill>
+                  <a:srgbClr val="24302A"/>
+                </a:solidFill>
+                <a:latin typeface="Pretendard" pitchFamily="34" charset="0"/>
+                <a:ea typeface="Pretendard" pitchFamily="34" charset="-122"/>
+                <a:cs typeface="Pretendard" pitchFamily="34" charset="-120"/>
+              </a:rPr>
+              <a:t>온라인 작성과 인쇄 활동지로</a:t>
             </a:r>
             <a:endParaRPr lang="en-US" sz="780" dirty="0"/>
           </a:p>
@@ -4835,35 +4804,15 @@
               <a:buNone/>
             </a:pPr>
             <a:r>
-              <a:rPr lang="ko-KR" altLang="en-US" sz="780" dirty="0">
-                <a:solidFill>
-                  <a:srgbClr val="4C574F"/>
-                </a:solidFill>
-                <a:latin typeface="Pretendard" pitchFamily="34" charset="0"/>
-                <a:ea typeface="Pretendard" pitchFamily="34" charset="-127"/>
-                <a:cs typeface="Pretendard" pitchFamily="34" charset="-120"/>
-              </a:rPr>
-              <a:t>PPT, 활동지, 지도안, 과정안이 준비되어</a:t>
-            </a:r>
-            <a:endParaRPr lang="en-US" sz="780" dirty="0"/>
-          </a:p>
-          <a:p>
-            <a:pPr algn="l" indent="0" marL="0">
-              <a:lnSpc>
-                <a:spcPts val="1125"/>
-              </a:lnSpc>
-              <a:buNone/>
-            </a:pPr>
-            <a:r>
-              <a:rPr lang="ko-KR" altLang="en-US" sz="780" dirty="0">
-                <a:solidFill>
-                  <a:srgbClr val="4C574F"/>
-                </a:solidFill>
-                <a:latin typeface="Pretendard" pitchFamily="34" charset="0"/>
-                <a:ea typeface="Pretendard" pitchFamily="34" charset="-127"/>
-                <a:cs typeface="Pretendard" pitchFamily="34" charset="-120"/>
-              </a:rPr>
-              <a:t>있습니다.</a:t>
+              <a:rPr lang="ko-KR" altLang="en-US" sz="780" b="1" dirty="0">
+                <a:solidFill>
+                  <a:srgbClr val="24302A"/>
+                </a:solidFill>
+                <a:latin typeface="Pretendard" pitchFamily="34" charset="0"/>
+                <a:ea typeface="Pretendard" pitchFamily="34" charset="-122"/>
+                <a:cs typeface="Pretendard" pitchFamily="34" charset="-120"/>
+              </a:rPr>
+              <a:t>같은 수업을 운영합니다.</a:t>
             </a:r>
             <a:endParaRPr lang="en-US" sz="780" dirty="0"/>
           </a:p>
@@ -4902,7 +4851,7 @@
                   <a:srgbClr val="4C574F"/>
                 </a:solidFill>
                 <a:latin typeface="Pretendard" pitchFamily="34" charset="0"/>
-                <a:ea typeface="Pretendard" pitchFamily="34" charset="-127"/>
+                <a:ea typeface="Pretendard" pitchFamily="34" charset="-122"/>
                 <a:cs typeface="Pretendard" pitchFamily="34" charset="-120"/>
               </a:rPr>
               <a:t>학교별 완독, 완독률, 어휘력 변화를 </a:t>
@@ -4919,7 +4868,7 @@
                   <a:srgbClr val="24302A"/>
                 </a:solidFill>
                 <a:latin typeface="Pretendard" pitchFamily="34" charset="0"/>
-                <a:ea typeface="Pretendard" pitchFamily="34" charset="-127"/>
+                <a:ea typeface="Pretendard" pitchFamily="34" charset="-122"/>
                 <a:cs typeface="Pretendard" pitchFamily="34" charset="-120"/>
               </a:rPr>
               <a:t>월간, 분기,</a:t>
@@ -4939,7 +4888,7 @@
                   <a:srgbClr val="24302A"/>
                 </a:solidFill>
                 <a:latin typeface="Pretendard" pitchFamily="34" charset="0"/>
-                <a:ea typeface="Pretendard" pitchFamily="34" charset="-127"/>
+                <a:ea typeface="Pretendard" pitchFamily="34" charset="-122"/>
                 <a:cs typeface="Pretendard" pitchFamily="34" charset="-120"/>
               </a:rPr>
               <a:t>종료 3회</a:t>
@@ -4956,7 +4905,7 @@
                   <a:srgbClr val="4C574F"/>
                 </a:solidFill>
                 <a:latin typeface="Pretendard" pitchFamily="34" charset="0"/>
-                <a:ea typeface="Pretendard" pitchFamily="34" charset="-127"/>
+                <a:ea typeface="Pretendard" pitchFamily="34" charset="-122"/>
                 <a:cs typeface="Pretendard" pitchFamily="34" charset="-120"/>
               </a:rPr>
               <a:t> 숫자로 보고합니다.</a:t>
@@ -4998,7 +4947,7 @@
                   <a:srgbClr val="4C574F"/>
                 </a:solidFill>
                 <a:latin typeface="Pretendard" pitchFamily="34" charset="0"/>
-                <a:ea typeface="Pretendard" pitchFamily="34" charset="-127"/>
+                <a:ea typeface="Pretendard" pitchFamily="34" charset="-122"/>
                 <a:cs typeface="Pretendard" pitchFamily="34" charset="-120"/>
               </a:rPr>
               <a:t>다 읽으면 인물이 된 부기가 묻고 까닭을 다시</a:t>
@@ -5018,7 +4967,7 @@
                   <a:srgbClr val="4C574F"/>
                 </a:solidFill>
                 <a:latin typeface="Pretendard" pitchFamily="34" charset="0"/>
-                <a:ea typeface="Pretendard" pitchFamily="34" charset="-127"/>
+                <a:ea typeface="Pretendard" pitchFamily="34" charset="-122"/>
                 <a:cs typeface="Pretendard" pitchFamily="34" charset="-120"/>
               </a:rPr>
               <a:t>묻습니다(</a:t>
@@ -5035,7 +4984,7 @@
                   <a:srgbClr val="24302A"/>
                 </a:solidFill>
                 <a:latin typeface="Pretendard" pitchFamily="34" charset="0"/>
-                <a:ea typeface="Pretendard" pitchFamily="34" charset="-127"/>
+                <a:ea typeface="Pretendard" pitchFamily="34" charset="-122"/>
                 <a:cs typeface="Pretendard" pitchFamily="34" charset="-120"/>
               </a:rPr>
               <a:t>캐릭터와 대화, 특허 등록</a:t>
@@ -5052,7 +5001,7 @@
                   <a:srgbClr val="4C574F"/>
                 </a:solidFill>
                 <a:latin typeface="Pretendard" pitchFamily="34" charset="0"/>
-                <a:ea typeface="Pretendard" pitchFamily="34" charset="-127"/>
+                <a:ea typeface="Pretendard" pitchFamily="34" charset="-122"/>
                 <a:cs typeface="Pretendard" pitchFamily="34" charset="-120"/>
               </a:rPr>
               <a:t>). 1~4학년</a:t>
@@ -5072,7 +5021,7 @@
                   <a:srgbClr val="4C574F"/>
                 </a:solidFill>
                 <a:latin typeface="Pretendard" pitchFamily="34" charset="0"/>
-                <a:ea typeface="Pretendard" pitchFamily="34" charset="-127"/>
+                <a:ea typeface="Pretendard" pitchFamily="34" charset="-122"/>
                 <a:cs typeface="Pretendard" pitchFamily="34" charset="-120"/>
               </a:rPr>
               <a:t>200권은 모국어와 한국어로 나란히 읽습니다.</a:t>
@@ -5114,7 +5063,7 @@
                   <a:srgbClr val="4C574F"/>
                 </a:solidFill>
                 <a:latin typeface="Pretendard" pitchFamily="34" charset="0"/>
-                <a:ea typeface="Pretendard" pitchFamily="34" charset="-127"/>
+                <a:ea typeface="Pretendard" pitchFamily="34" charset="-122"/>
                 <a:cs typeface="Pretendard" pitchFamily="34" charset="-120"/>
               </a:rPr>
               <a:t>교육부 「학교 독서교육 활성화 방안」의 책 읽는</a:t>
@@ -5134,7 +5083,7 @@
                   <a:srgbClr val="4C574F"/>
                 </a:solidFill>
                 <a:latin typeface="Pretendard" pitchFamily="34" charset="0"/>
-                <a:ea typeface="Pretendard" pitchFamily="34" charset="-127"/>
+                <a:ea typeface="Pretendard" pitchFamily="34" charset="-122"/>
                 <a:cs typeface="Pretendard" pitchFamily="34" charset="-120"/>
               </a:rPr>
               <a:t>학교 문화, 초3~4 독서교육 집중 학년, 독서 연계</a:t>
@@ -5154,7 +5103,7 @@
                   <a:srgbClr val="4C574F"/>
                 </a:solidFill>
                 <a:latin typeface="Pretendard" pitchFamily="34" charset="0"/>
-                <a:ea typeface="Pretendard" pitchFamily="34" charset="-127"/>
+                <a:ea typeface="Pretendard" pitchFamily="34" charset="-122"/>
                 <a:cs typeface="Pretendard" pitchFamily="34" charset="-120"/>
               </a:rPr>
               <a:t>교과 수업에 씁니다.</a:t>
@@ -5196,7 +5145,7 @@
                   <a:srgbClr val="24302A"/>
                 </a:solidFill>
                 <a:latin typeface="Pretendard" pitchFamily="34" charset="0"/>
-                <a:ea typeface="Pretendard" pitchFamily="34" charset="-127"/>
+                <a:ea typeface="Pretendard" pitchFamily="34" charset="-122"/>
                 <a:cs typeface="Pretendard" pitchFamily="34" charset="-120"/>
               </a:rPr>
               <a:t>독후활동 40종</a:t>
@@ -5213,7 +5162,7 @@
                   <a:srgbClr val="4C574F"/>
                 </a:solidFill>
                 <a:latin typeface="Pretendard" pitchFamily="34" charset="0"/>
-                <a:ea typeface="Pretendard" pitchFamily="34" charset="-127"/>
+                <a:ea typeface="Pretendard" pitchFamily="34" charset="-122"/>
                 <a:cs typeface="Pretendard" pitchFamily="34" charset="-120"/>
               </a:rPr>
               <a:t>을 골라 내주고, 어휘력 진단</a:t>
@@ -5233,7 +5182,7 @@
                   <a:srgbClr val="4C574F"/>
                 </a:solidFill>
                 <a:latin typeface="Pretendard" pitchFamily="34" charset="0"/>
-                <a:ea typeface="Pretendard" pitchFamily="34" charset="-127"/>
+                <a:ea typeface="Pretendard" pitchFamily="34" charset="-122"/>
                 <a:cs typeface="Pretendard" pitchFamily="34" charset="-120"/>
               </a:rPr>
               <a:t>결과로 학생마다 3개 수준의 책을 권합니다.</a:t>
@@ -5275,7 +5224,7 @@
                   <a:srgbClr val="FFFFFF"/>
                 </a:solidFill>
                 <a:latin typeface="Pretendard" pitchFamily="34" charset="0"/>
-                <a:ea typeface="Pretendard" pitchFamily="34" charset="-127"/>
+                <a:ea typeface="Pretendard" pitchFamily="34" charset="-122"/>
                 <a:cs typeface="Pretendard" pitchFamily="34" charset="-120"/>
               </a:rPr>
               <a:t>4</a:t>
@@ -5317,7 +5266,7 @@
                   <a:srgbClr val="7B847D"/>
                 </a:solidFill>
                 <a:latin typeface="Pretendard Medium" pitchFamily="34" charset="0"/>
-                <a:ea typeface="Pretendard Medium" pitchFamily="34" charset="-127"/>
+                <a:ea typeface="Pretendard Medium" pitchFamily="34" charset="-122"/>
                 <a:cs typeface="Pretendard Medium" pitchFamily="34" charset="-120"/>
               </a:rPr>
               <a:t>2026. 9. 20.~10. 21., 온오프라인 운영 종합</a:t>
@@ -5359,7 +5308,7 @@
                   <a:srgbClr val="1D3A2A"/>
                 </a:solidFill>
                 <a:latin typeface="Pretendard ExtraBold" pitchFamily="34" charset="0"/>
-                <a:ea typeface="Pretendard ExtraBold" pitchFamily="34" charset="-127"/>
+                <a:ea typeface="Pretendard ExtraBold" pitchFamily="34" charset="-122"/>
                 <a:cs typeface="Pretendard ExtraBold" pitchFamily="34" charset="-120"/>
               </a:rPr>
               <a:t>선도교사단 한 달 운영 결과</a:t>
@@ -5401,7 +5350,7 @@
                   <a:srgbClr val="1D3A2A"/>
                 </a:solidFill>
                 <a:latin typeface="Pretendard ExtraBold" pitchFamily="34" charset="0"/>
-                <a:ea typeface="Pretendard ExtraBold" pitchFamily="34" charset="-127"/>
+                <a:ea typeface="Pretendard ExtraBold" pitchFamily="34" charset="-122"/>
                 <a:cs typeface="Pretendard ExtraBold" pitchFamily="34" charset="-120"/>
               </a:rPr>
               <a:t>72</a:t>
@@ -5418,7 +5367,7 @@
                   <a:srgbClr val="1D3A2A"/>
                 </a:solidFill>
                 <a:latin typeface="Pretendard" pitchFamily="34" charset="0"/>
-                <a:ea typeface="Pretendard" pitchFamily="34" charset="-127"/>
+                <a:ea typeface="Pretendard" pitchFamily="34" charset="-122"/>
                 <a:cs typeface="Pretendard" pitchFamily="34" charset="-120"/>
               </a:rPr>
               <a:t>학급</a:t>
@@ -5460,7 +5409,7 @@
                   <a:srgbClr val="1D3A2A"/>
                 </a:solidFill>
                 <a:latin typeface="Pretendard ExtraBold" pitchFamily="34" charset="0"/>
-                <a:ea typeface="Pretendard ExtraBold" pitchFamily="34" charset="-127"/>
+                <a:ea typeface="Pretendard ExtraBold" pitchFamily="34" charset="-122"/>
                 <a:cs typeface="Pretendard ExtraBold" pitchFamily="34" charset="-120"/>
               </a:rPr>
               <a:t>1,196</a:t>
@@ -5477,7 +5426,7 @@
                   <a:srgbClr val="1D3A2A"/>
                 </a:solidFill>
                 <a:latin typeface="Pretendard" pitchFamily="34" charset="0"/>
-                <a:ea typeface="Pretendard" pitchFamily="34" charset="-127"/>
+                <a:ea typeface="Pretendard" pitchFamily="34" charset="-122"/>
                 <a:cs typeface="Pretendard" pitchFamily="34" charset="-120"/>
               </a:rPr>
               <a:t>명</a:t>
@@ -5519,7 +5468,7 @@
                   <a:srgbClr val="C08A1E"/>
                 </a:solidFill>
                 <a:latin typeface="Pretendard ExtraBold" pitchFamily="34" charset="0"/>
-                <a:ea typeface="Pretendard ExtraBold" pitchFamily="34" charset="-127"/>
+                <a:ea typeface="Pretendard ExtraBold" pitchFamily="34" charset="-122"/>
                 <a:cs typeface="Pretendard ExtraBold" pitchFamily="34" charset="-120"/>
               </a:rPr>
               <a:t>26,924</a:t>
@@ -5536,7 +5485,7 @@
                   <a:srgbClr val="C08A1E"/>
                 </a:solidFill>
                 <a:latin typeface="Pretendard" pitchFamily="34" charset="0"/>
-                <a:ea typeface="Pretendard" pitchFamily="34" charset="-127"/>
+                <a:ea typeface="Pretendard" pitchFamily="34" charset="-122"/>
                 <a:cs typeface="Pretendard" pitchFamily="34" charset="-120"/>
               </a:rPr>
               <a:t>권</a:t>
@@ -5578,7 +5527,7 @@
                   <a:srgbClr val="1D3A2A"/>
                 </a:solidFill>
                 <a:latin typeface="Pretendard ExtraBold" pitchFamily="34" charset="0"/>
-                <a:ea typeface="Pretendard ExtraBold" pitchFamily="34" charset="-127"/>
+                <a:ea typeface="Pretendard ExtraBold" pitchFamily="34" charset="-122"/>
                 <a:cs typeface="Pretendard ExtraBold" pitchFamily="34" charset="-120"/>
               </a:rPr>
               <a:t>1,816</a:t>
@@ -5595,7 +5544,7 @@
                   <a:srgbClr val="1D3A2A"/>
                 </a:solidFill>
                 <a:latin typeface="Pretendard" pitchFamily="34" charset="0"/>
-                <a:ea typeface="Pretendard" pitchFamily="34" charset="-127"/>
+                <a:ea typeface="Pretendard" pitchFamily="34" charset="-122"/>
                 <a:cs typeface="Pretendard" pitchFamily="34" charset="-120"/>
               </a:rPr>
               <a:t>건</a:t>
@@ -5637,7 +5586,7 @@
                   <a:srgbClr val="4C574F"/>
                 </a:solidFill>
                 <a:latin typeface="Pretendard" pitchFamily="34" charset="0"/>
-                <a:ea typeface="Pretendard" pitchFamily="34" charset="-127"/>
+                <a:ea typeface="Pretendard" pitchFamily="34" charset="-122"/>
                 <a:cs typeface="Pretendard" pitchFamily="34" charset="-120"/>
               </a:rPr>
               <a:t>온오프라인</a:t>
@@ -5657,7 +5606,7 @@
                   <a:srgbClr val="4C574F"/>
                 </a:solidFill>
                 <a:latin typeface="Pretendard" pitchFamily="34" charset="0"/>
-                <a:ea typeface="Pretendard" pitchFamily="34" charset="-127"/>
+                <a:ea typeface="Pretendard" pitchFamily="34" charset="-122"/>
                 <a:cs typeface="Pretendard" pitchFamily="34" charset="-120"/>
               </a:rPr>
               <a:t>운영</a:t>
@@ -5699,7 +5648,7 @@
                   <a:srgbClr val="4C574F"/>
                 </a:solidFill>
                 <a:latin typeface="Pretendard" pitchFamily="34" charset="0"/>
-                <a:ea typeface="Pretendard" pitchFamily="34" charset="-127"/>
+                <a:ea typeface="Pretendard" pitchFamily="34" charset="-122"/>
                 <a:cs typeface="Pretendard" pitchFamily="34" charset="-120"/>
               </a:rPr>
               <a:t>한 달 동안</a:t>
@@ -5719,7 +5668,7 @@
                   <a:srgbClr val="4C574F"/>
                 </a:solidFill>
                 <a:latin typeface="Pretendard" pitchFamily="34" charset="0"/>
-                <a:ea typeface="Pretendard" pitchFamily="34" charset="-127"/>
+                <a:ea typeface="Pretendard" pitchFamily="34" charset="-122"/>
                 <a:cs typeface="Pretendard" pitchFamily="34" charset="-120"/>
               </a:rPr>
               <a:t>실제로 쓴 학생</a:t>
@@ -5761,7 +5710,7 @@
                   <a:srgbClr val="4C574F"/>
                 </a:solidFill>
                 <a:latin typeface="Pretendard" pitchFamily="34" charset="0"/>
-                <a:ea typeface="Pretendard" pitchFamily="34" charset="-127"/>
+                <a:ea typeface="Pretendard" pitchFamily="34" charset="-122"/>
                 <a:cs typeface="Pretendard" pitchFamily="34" charset="-120"/>
               </a:rPr>
               <a:t>완독 기록</a:t>
@@ -5781,7 +5730,7 @@
                   <a:srgbClr val="4C574F"/>
                 </a:solidFill>
                 <a:latin typeface="Pretendard" pitchFamily="34" charset="0"/>
-                <a:ea typeface="Pretendard" pitchFamily="34" charset="-127"/>
+                <a:ea typeface="Pretendard" pitchFamily="34" charset="-122"/>
                 <a:cs typeface="Pretendard" pitchFamily="34" charset="-120"/>
               </a:rPr>
               <a:t>1인당 22.5권</a:t>
@@ -5823,7 +5772,7 @@
                   <a:srgbClr val="4C574F"/>
                 </a:solidFill>
                 <a:latin typeface="Pretendard" pitchFamily="34" charset="0"/>
-                <a:ea typeface="Pretendard" pitchFamily="34" charset="-127"/>
+                <a:ea typeface="Pretendard" pitchFamily="34" charset="-122"/>
                 <a:cs typeface="Pretendard" pitchFamily="34" charset="-120"/>
               </a:rPr>
               <a:t>학생</a:t>
@@ -5843,7 +5792,7 @@
                   <a:srgbClr val="4C574F"/>
                 </a:solidFill>
                 <a:latin typeface="Pretendard" pitchFamily="34" charset="0"/>
-                <a:ea typeface="Pretendard" pitchFamily="34" charset="-127"/>
+                <a:ea typeface="Pretendard" pitchFamily="34" charset="-122"/>
                 <a:cs typeface="Pretendard" pitchFamily="34" charset="-120"/>
               </a:rPr>
               <a:t>독후활동</a:t>
@@ -5885,7 +5834,7 @@
                   <a:srgbClr val="24302A"/>
                 </a:solidFill>
                 <a:latin typeface="Pretendard" pitchFamily="34" charset="0"/>
-                <a:ea typeface="Pretendard" pitchFamily="34" charset="-127"/>
+                <a:ea typeface="Pretendard" pitchFamily="34" charset="-122"/>
                 <a:cs typeface="Pretendard" pitchFamily="34" charset="-120"/>
               </a:rPr>
               <a:t>“…부기를 활용하니 책을 더 많이 읽게 된 것 같아요. 또 캐릭터 꾸미기를 아이들이 너무 좋아하여 쉬는 시간에도 계속 읽고</a:t>
@@ -5905,7 +5854,7 @@
                   <a:srgbClr val="24302A"/>
                 </a:solidFill>
                 <a:latin typeface="Pretendard" pitchFamily="34" charset="0"/>
-                <a:ea typeface="Pretendard" pitchFamily="34" charset="-127"/>
+                <a:ea typeface="Pretendard" pitchFamily="34" charset="-122"/>
                 <a:cs typeface="Pretendard" pitchFamily="34" charset="-120"/>
               </a:rPr>
               <a:t>있네요.”</a:t>
@@ -5922,7 +5871,7 @@
                   <a:srgbClr val="7B847D"/>
                 </a:solidFill>
                 <a:latin typeface="Pretendard" pitchFamily="34" charset="0"/>
-                <a:ea typeface="Pretendard" pitchFamily="34" charset="-127"/>
+                <a:ea typeface="Pretendard" pitchFamily="34" charset="-122"/>
                 <a:cs typeface="Pretendard" pitchFamily="34" charset="-120"/>
               </a:rPr>
               <a:t>  석산초 4학년 김○○ 교사</a:t>
@@ -5964,7 +5913,7 @@
                   <a:srgbClr val="FFFFFF"/>
                 </a:solidFill>
                 <a:latin typeface="Pretendard" pitchFamily="34" charset="0"/>
-                <a:ea typeface="Pretendard" pitchFamily="34" charset="-127"/>
+                <a:ea typeface="Pretendard" pitchFamily="34" charset="-122"/>
                 <a:cs typeface="Pretendard" pitchFamily="34" charset="-120"/>
               </a:rPr>
               <a:t>석산초 6학년 부기 수업(얼굴 가림)</a:t>
@@ -6006,7 +5955,7 @@
                   <a:srgbClr val="4C574F"/>
                 </a:solidFill>
                 <a:latin typeface="Pretendard" pitchFamily="34" charset="0"/>
-                <a:ea typeface="Pretendard" pitchFamily="34" charset="-127"/>
+                <a:ea typeface="Pretendard" pitchFamily="34" charset="-122"/>
                 <a:cs typeface="Pretendard" pitchFamily="34" charset="-120"/>
               </a:rPr>
               <a:t>22개 학교 교사 33명이 스스로 신청해 선도교사단을 꾸렸고, </a:t>
@@ -6023,7 +5972,7 @@
                   <a:srgbClr val="1D3A2A"/>
                 </a:solidFill>
                 <a:latin typeface="Pretendard" pitchFamily="34" charset="0"/>
-                <a:ea typeface="Pretendard" pitchFamily="34" charset="-127"/>
+                <a:ea typeface="Pretendard" pitchFamily="34" charset="-122"/>
                 <a:cs typeface="Pretendard" pitchFamily="34" charset="-120"/>
               </a:rPr>
               <a:t>12월에 선도교사단을 300개 학교로 넓힙니다.</a:t>
@@ -6065,7 +6014,7 @@
                   <a:srgbClr val="FFFFFF"/>
                 </a:solidFill>
                 <a:latin typeface="Pretendard" pitchFamily="34" charset="0"/>
-                <a:ea typeface="Pretendard" pitchFamily="34" charset="-127"/>
+                <a:ea typeface="Pretendard" pitchFamily="34" charset="-122"/>
                 <a:cs typeface="Pretendard" pitchFamily="34" charset="-120"/>
               </a:rPr>
               <a:t>5</a:t>
@@ -6107,7 +6056,7 @@
                   <a:srgbClr val="7B847D"/>
                 </a:solidFill>
                 <a:latin typeface="Pretendard Medium" pitchFamily="34" charset="0"/>
-                <a:ea typeface="Pretendard Medium" pitchFamily="34" charset="-127"/>
+                <a:ea typeface="Pretendard Medium" pitchFamily="34" charset="-122"/>
                 <a:cs typeface="Pretendard Medium" pitchFamily="34" charset="-120"/>
               </a:rPr>
               <a:t>개발 기간 없이 계약 직후 시작, 전담 조직 9명(총괄 PM 1, 수업과 콘텐츠 2, 기술 운영 2, 현장 지원 3, 헬프데스크 1)</a:t>
@@ -6149,7 +6098,7 @@
                   <a:srgbClr val="1D3A2A"/>
                 </a:solidFill>
                 <a:latin typeface="Pretendard ExtraBold" pitchFamily="34" charset="0"/>
-                <a:ea typeface="Pretendard ExtraBold" pitchFamily="34" charset="-127"/>
+                <a:ea typeface="Pretendard ExtraBold" pitchFamily="34" charset="-122"/>
                 <a:cs typeface="Pretendard ExtraBold" pitchFamily="34" charset="-120"/>
               </a:rPr>
               <a:t>추진 일정과 운영지원</a:t>
@@ -6191,7 +6140,7 @@
                   <a:srgbClr val="1D3A2A"/>
                 </a:solidFill>
                 <a:latin typeface="Pretendard ExtraBold" pitchFamily="34" charset="0"/>
-                <a:ea typeface="Pretendard ExtraBold" pitchFamily="34" charset="-127"/>
+                <a:ea typeface="Pretendard ExtraBold" pitchFamily="34" charset="-122"/>
                 <a:cs typeface="Pretendard ExtraBold" pitchFamily="34" charset="-120"/>
               </a:rPr>
               <a:t>1 착수와 준비</a:t>
@@ -6233,7 +6182,7 @@
                   <a:srgbClr val="1D3A2A"/>
                 </a:solidFill>
                 <a:latin typeface="Pretendard ExtraBold" pitchFamily="34" charset="0"/>
-                <a:ea typeface="Pretendard ExtraBold" pitchFamily="34" charset="-127"/>
+                <a:ea typeface="Pretendard ExtraBold" pitchFamily="34" charset="-122"/>
                 <a:cs typeface="Pretendard ExtraBold" pitchFamily="34" charset="-120"/>
               </a:rPr>
               <a:t>2 배포와 연수</a:t>
@@ -6275,7 +6224,7 @@
                   <a:srgbClr val="1D3A2A"/>
                 </a:solidFill>
                 <a:latin typeface="Pretendard ExtraBold" pitchFamily="34" charset="0"/>
-                <a:ea typeface="Pretendard ExtraBold" pitchFamily="34" charset="-127"/>
+                <a:ea typeface="Pretendard ExtraBold" pitchFamily="34" charset="-122"/>
                 <a:cs typeface="Pretendard ExtraBold" pitchFamily="34" charset="-120"/>
               </a:rPr>
               <a:t>3 운영과 지원</a:t>
@@ -6317,7 +6266,7 @@
                   <a:srgbClr val="1D3A2A"/>
                 </a:solidFill>
                 <a:latin typeface="Pretendard ExtraBold" pitchFamily="34" charset="0"/>
-                <a:ea typeface="Pretendard ExtraBold" pitchFamily="34" charset="-127"/>
+                <a:ea typeface="Pretendard ExtraBold" pitchFamily="34" charset="-122"/>
                 <a:cs typeface="Pretendard ExtraBold" pitchFamily="34" charset="-120"/>
               </a:rPr>
               <a:t>4 성과와 환류</a:t>
@@ -6359,7 +6308,7 @@
                   <a:srgbClr val="C08A1E"/>
                 </a:solidFill>
                 <a:latin typeface="Pretendard SemiBold" pitchFamily="34" charset="0"/>
-                <a:ea typeface="Pretendard SemiBold" pitchFamily="34" charset="-127"/>
+                <a:ea typeface="Pretendard SemiBold" pitchFamily="34" charset="-122"/>
                 <a:cs typeface="Pretendard SemiBold" pitchFamily="34" charset="-120"/>
               </a:rPr>
               <a:t>계약~D+30</a:t>
@@ -6379,7 +6328,7 @@
                   <a:srgbClr val="4C574F"/>
                 </a:solidFill>
                 <a:latin typeface="Pretendard" pitchFamily="34" charset="0"/>
-                <a:ea typeface="Pretendard" pitchFamily="34" charset="-127"/>
+                <a:ea typeface="Pretendard" pitchFamily="34" charset="-122"/>
                 <a:cs typeface="Pretendard" pitchFamily="34" charset="-120"/>
               </a:rPr>
               <a:t>참여 학교 선정, 학급코드 발급 설계,</a:t>
@@ -6421,7 +6370,7 @@
                   <a:srgbClr val="C08A1E"/>
                 </a:solidFill>
                 <a:latin typeface="Pretendard SemiBold" pitchFamily="34" charset="0"/>
-                <a:ea typeface="Pretendard SemiBold" pitchFamily="34" charset="-127"/>
+                <a:ea typeface="Pretendard SemiBold" pitchFamily="34" charset="-122"/>
                 <a:cs typeface="Pretendard SemiBold" pitchFamily="34" charset="-120"/>
               </a:rPr>
               <a:t>D+31~D+75</a:t>
@@ -6441,7 +6390,7 @@
                   <a:srgbClr val="4C574F"/>
                 </a:solidFill>
                 <a:latin typeface="Pretendard" pitchFamily="34" charset="0"/>
-                <a:ea typeface="Pretendard" pitchFamily="34" charset="-127"/>
+                <a:ea typeface="Pretendard" pitchFamily="34" charset="-122"/>
                 <a:cs typeface="Pretendard" pitchFamily="34" charset="-120"/>
               </a:rPr>
               <a:t>찾아가는 교원 연수 15시간, 학교별</a:t>
@@ -6483,7 +6432,7 @@
                   <a:srgbClr val="C08A1E"/>
                 </a:solidFill>
                 <a:latin typeface="Pretendard SemiBold" pitchFamily="34" charset="0"/>
-                <a:ea typeface="Pretendard SemiBold" pitchFamily="34" charset="-127"/>
+                <a:ea typeface="Pretendard SemiBold" pitchFamily="34" charset="-122"/>
                 <a:cs typeface="Pretendard SemiBold" pitchFamily="34" charset="-120"/>
               </a:rPr>
               <a:t>D+76~종료 1개월 전</a:t>
@@ -6503,7 +6452,7 @@
                   <a:srgbClr val="4C574F"/>
                 </a:solidFill>
                 <a:latin typeface="Pretendard" pitchFamily="34" charset="0"/>
-                <a:ea typeface="Pretendard" pitchFamily="34" charset="-127"/>
+                <a:ea typeface="Pretendard" pitchFamily="34" charset="-122"/>
                 <a:cs typeface="Pretendard" pitchFamily="34" charset="-120"/>
               </a:rPr>
               <a:t>월간 이용 현황 점검, 미활용 학급 선제</a:t>
@@ -6545,7 +6494,7 @@
                   <a:srgbClr val="C08A1E"/>
                 </a:solidFill>
                 <a:latin typeface="Pretendard SemiBold" pitchFamily="34" charset="0"/>
-                <a:ea typeface="Pretendard SemiBold" pitchFamily="34" charset="-127"/>
+                <a:ea typeface="Pretendard SemiBold" pitchFamily="34" charset="-122"/>
                 <a:cs typeface="Pretendard SemiBold" pitchFamily="34" charset="-120"/>
               </a:rPr>
               <a:t>종료 1개월 전~종료</a:t>
@@ -6565,7 +6514,7 @@
                   <a:srgbClr val="4C574F"/>
                 </a:solidFill>
                 <a:latin typeface="Pretendard" pitchFamily="34" charset="0"/>
-                <a:ea typeface="Pretendard" pitchFamily="34" charset="-127"/>
+                <a:ea typeface="Pretendard" pitchFamily="34" charset="-122"/>
                 <a:cs typeface="Pretendard" pitchFamily="34" charset="-120"/>
               </a:rPr>
               <a:t>성장 분석 보고, 학생과 교사 만족도</a:t>
@@ -6607,7 +6556,7 @@
                   <a:srgbClr val="4C574F"/>
                 </a:solidFill>
                 <a:latin typeface="Pretendard" pitchFamily="34" charset="0"/>
-                <a:ea typeface="Pretendard" pitchFamily="34" charset="-127"/>
+                <a:ea typeface="Pretendard" pitchFamily="34" charset="-122"/>
                 <a:cs typeface="Pretendard" pitchFamily="34" charset="-120"/>
               </a:rPr>
               <a:t>개인정보 보호 협의</a:t>
@@ -6649,7 +6598,7 @@
                   <a:srgbClr val="4C574F"/>
                 </a:solidFill>
                 <a:latin typeface="Pretendard" pitchFamily="34" charset="0"/>
-                <a:ea typeface="Pretendard" pitchFamily="34" charset="-127"/>
+                <a:ea typeface="Pretendard" pitchFamily="34" charset="-122"/>
                 <a:cs typeface="Pretendard" pitchFamily="34" charset="-120"/>
               </a:rPr>
               <a:t>온보딩, 헬프데스크 개설</a:t>
@@ -6691,7 +6640,7 @@
                   <a:srgbClr val="4C574F"/>
                 </a:solidFill>
                 <a:latin typeface="Pretendard" pitchFamily="34" charset="0"/>
-                <a:ea typeface="Pretendard" pitchFamily="34" charset="-127"/>
+                <a:ea typeface="Pretendard" pitchFamily="34" charset="-122"/>
                 <a:cs typeface="Pretendard" pitchFamily="34" charset="-120"/>
               </a:rPr>
               <a:t>지원, 우수 사례 발굴</a:t>
@@ -6733,7 +6682,7 @@
                   <a:srgbClr val="4C574F"/>
                 </a:solidFill>
                 <a:latin typeface="Pretendard" pitchFamily="34" charset="0"/>
-                <a:ea typeface="Pretendard" pitchFamily="34" charset="-127"/>
+                <a:ea typeface="Pretendard" pitchFamily="34" charset="-122"/>
                 <a:cs typeface="Pretendard" pitchFamily="34" charset="-120"/>
               </a:rPr>
               <a:t>조사, 결과 보고</a:t>
@@ -6775,7 +6724,7 @@
                   <a:srgbClr val="FFFFFF"/>
                 </a:solidFill>
                 <a:latin typeface="Pretendard" pitchFamily="34" charset="0"/>
-                <a:ea typeface="Pretendard" pitchFamily="34" charset="-127"/>
+                <a:ea typeface="Pretendard" pitchFamily="34" charset="-122"/>
                 <a:cs typeface="Pretendard" pitchFamily="34" charset="-120"/>
               </a:rPr>
               <a:t>6</a:t>
@@ -6817,7 +6766,7 @@
                   <a:srgbClr val="FFFFFF"/>
                 </a:solidFill>
                 <a:latin typeface="Pretendard" pitchFamily="34" charset="0"/>
-                <a:ea typeface="Pretendard" pitchFamily="34" charset="-127"/>
+                <a:ea typeface="Pretendard" pitchFamily="34" charset="-122"/>
                 <a:cs typeface="Pretendard" pitchFamily="34" charset="-120"/>
               </a:rPr>
               <a:t>7</a:t>
@@ -6859,7 +6808,7 @@
                   <a:srgbClr val="FFFFFF"/>
                 </a:solidFill>
                 <a:latin typeface="Pretendard" pitchFamily="34" charset="0"/>
-                <a:ea typeface="Pretendard" pitchFamily="34" charset="-127"/>
+                <a:ea typeface="Pretendard" pitchFamily="34" charset="-122"/>
                 <a:cs typeface="Pretendard" pitchFamily="34" charset="-120"/>
               </a:rPr>
               <a:t>8</a:t>
@@ -6901,7 +6850,7 @@
                   <a:srgbClr val="1D3A2A"/>
                 </a:solidFill>
                 <a:latin typeface="Pretendard ExtraBold" pitchFamily="34" charset="0"/>
-                <a:ea typeface="Pretendard ExtraBold" pitchFamily="34" charset="-127"/>
+                <a:ea typeface="Pretendard ExtraBold" pitchFamily="34" charset="-122"/>
                 <a:cs typeface="Pretendard ExtraBold" pitchFamily="34" charset="-120"/>
               </a:rPr>
               <a:t>1년차 성과 목표(안)</a:t>
@@ -6943,7 +6892,7 @@
                   <a:srgbClr val="1D3A2A"/>
                 </a:solidFill>
                 <a:latin typeface="Pretendard ExtraBold" pitchFamily="34" charset="0"/>
-                <a:ea typeface="Pretendard ExtraBold" pitchFamily="34" charset="-127"/>
+                <a:ea typeface="Pretendard ExtraBold" pitchFamily="34" charset="-122"/>
                 <a:cs typeface="Pretendard ExtraBold" pitchFamily="34" charset="-120"/>
               </a:rPr>
               <a:t>연간 사업비(안)</a:t>
@@ -6960,7 +6909,7 @@
                   <a:srgbClr val="7B847D"/>
                 </a:solidFill>
                 <a:latin typeface="Pretendard Medium" pitchFamily="34" charset="0"/>
-                <a:ea typeface="Pretendard Medium" pitchFamily="34" charset="-127"/>
+                <a:ea typeface="Pretendard Medium" pitchFamily="34" charset="-122"/>
                 <a:cs typeface="Pretendard Medium" pitchFamily="34" charset="-120"/>
               </a:rPr>
               <a:t>   학교당</a:t>
@@ -7002,7 +6951,7 @@
                   <a:srgbClr val="1D3A2A"/>
                 </a:solidFill>
                 <a:latin typeface="Pretendard ExtraBold" pitchFamily="34" charset="0"/>
-                <a:ea typeface="Pretendard ExtraBold" pitchFamily="34" charset="-127"/>
+                <a:ea typeface="Pretendard ExtraBold" pitchFamily="34" charset="-122"/>
                 <a:cs typeface="Pretendard ExtraBold" pitchFamily="34" charset="-120"/>
               </a:rPr>
               <a:t>수행 기관 MSECM</a:t>
@@ -7044,7 +6993,7 @@
                   <a:srgbClr val="2E7A4E"/>
                 </a:solidFill>
                 <a:latin typeface="Pretendard ExtraBold" pitchFamily="34" charset="0"/>
-                <a:ea typeface="Pretendard ExtraBold" pitchFamily="34" charset="-127"/>
+                <a:ea typeface="Pretendard ExtraBold" pitchFamily="34" charset="-122"/>
                 <a:cs typeface="Pretendard ExtraBold" pitchFamily="34" charset="-120"/>
               </a:rPr>
               <a:t>20% 증가</a:t>
@@ -7086,7 +7035,7 @@
                   <a:srgbClr val="2E7A4E"/>
                 </a:solidFill>
                 <a:latin typeface="Pretendard ExtraBold" pitchFamily="34" charset="0"/>
-                <a:ea typeface="Pretendard ExtraBold" pitchFamily="34" charset="-127"/>
+                <a:ea typeface="Pretendard ExtraBold" pitchFamily="34" charset="-122"/>
                 <a:cs typeface="Pretendard ExtraBold" pitchFamily="34" charset="-120"/>
               </a:rPr>
               <a:t>5%p 상승</a:t>
@@ -7128,7 +7077,7 @@
                   <a:srgbClr val="2E7A4E"/>
                 </a:solidFill>
                 <a:latin typeface="Pretendard ExtraBold" pitchFamily="34" charset="0"/>
-                <a:ea typeface="Pretendard ExtraBold" pitchFamily="34" charset="-127"/>
+                <a:ea typeface="Pretendard ExtraBold" pitchFamily="34" charset="-122"/>
                 <a:cs typeface="Pretendard ExtraBold" pitchFamily="34" charset="-120"/>
               </a:rPr>
               <a:t>20% 감소</a:t>
@@ -7170,7 +7119,7 @@
                   <a:srgbClr val="1D3A2A"/>
                 </a:solidFill>
                 <a:latin typeface="Pretendard ExtraBold" pitchFamily="34" charset="0"/>
-                <a:ea typeface="Pretendard ExtraBold" pitchFamily="34" charset="-127"/>
+                <a:ea typeface="Pretendard ExtraBold" pitchFamily="34" charset="-122"/>
                 <a:cs typeface="Pretendard ExtraBold" pitchFamily="34" charset="-120"/>
               </a:rPr>
               <a:t>185</a:t>
@@ -7187,7 +7136,7 @@
                   <a:srgbClr val="1D3A2A"/>
                 </a:solidFill>
                 <a:latin typeface="Pretendard" pitchFamily="34" charset="0"/>
-                <a:ea typeface="Pretendard" pitchFamily="34" charset="-127"/>
+                <a:ea typeface="Pretendard" pitchFamily="34" charset="-122"/>
                 <a:cs typeface="Pretendard" pitchFamily="34" charset="-120"/>
               </a:rPr>
               <a:t>건</a:t>
@@ -7229,7 +7178,7 @@
                   <a:srgbClr val="1D3A2A"/>
                 </a:solidFill>
                 <a:latin typeface="Pretendard ExtraBold" pitchFamily="34" charset="0"/>
-                <a:ea typeface="Pretendard ExtraBold" pitchFamily="34" charset="-127"/>
+                <a:ea typeface="Pretendard ExtraBold" pitchFamily="34" charset="-122"/>
                 <a:cs typeface="Pretendard ExtraBold" pitchFamily="34" charset="-120"/>
               </a:rPr>
               <a:t>93.0</a:t>
@@ -7246,7 +7195,7 @@
                   <a:srgbClr val="1D3A2A"/>
                 </a:solidFill>
                 <a:latin typeface="Pretendard" pitchFamily="34" charset="0"/>
-                <a:ea typeface="Pretendard" pitchFamily="34" charset="-127"/>
+                <a:ea typeface="Pretendard" pitchFamily="34" charset="-122"/>
                 <a:cs typeface="Pretendard" pitchFamily="34" charset="-120"/>
               </a:rPr>
               <a:t>억 원</a:t>
@@ -7288,7 +7237,7 @@
                   <a:srgbClr val="1D3A2A"/>
                 </a:solidFill>
                 <a:latin typeface="Pretendard ExtraBold" pitchFamily="34" charset="0"/>
-                <a:ea typeface="Pretendard ExtraBold" pitchFamily="34" charset="-127"/>
+                <a:ea typeface="Pretendard ExtraBold" pitchFamily="34" charset="-122"/>
                 <a:cs typeface="Pretendard ExtraBold" pitchFamily="34" charset="-120"/>
               </a:rPr>
               <a:t>500</a:t>
@@ -7305,7 +7254,7 @@
                   <a:srgbClr val="1D3A2A"/>
                 </a:solidFill>
                 <a:latin typeface="Pretendard" pitchFamily="34" charset="0"/>
-                <a:ea typeface="Pretendard" pitchFamily="34" charset="-127"/>
+                <a:ea typeface="Pretendard" pitchFamily="34" charset="-122"/>
                 <a:cs typeface="Pretendard" pitchFamily="34" charset="-120"/>
               </a:rPr>
               <a:t>만 원</a:t>
@@ -7347,7 +7296,7 @@
                   <a:srgbClr val="F2D58A"/>
                 </a:solidFill>
                 <a:latin typeface="Pretendard ExtraBold" pitchFamily="34" charset="0"/>
-                <a:ea typeface="Pretendard ExtraBold" pitchFamily="34" charset="-127"/>
+                <a:ea typeface="Pretendard ExtraBold" pitchFamily="34" charset="-122"/>
                 <a:cs typeface="Pretendard ExtraBold" pitchFamily="34" charset="-120"/>
               </a:rPr>
               <a:t>1,000</a:t>
@@ -7364,7 +7313,7 @@
                   <a:srgbClr val="F2D58A"/>
                 </a:solidFill>
                 <a:latin typeface="Pretendard" pitchFamily="34" charset="0"/>
-                <a:ea typeface="Pretendard" pitchFamily="34" charset="-127"/>
+                <a:ea typeface="Pretendard" pitchFamily="34" charset="-122"/>
                 <a:cs typeface="Pretendard" pitchFamily="34" charset="-120"/>
               </a:rPr>
               <a:t>만 원</a:t>
@@ -7406,7 +7355,7 @@
                   <a:srgbClr val="4C574F"/>
                 </a:solidFill>
                 <a:latin typeface="Pretendard" pitchFamily="34" charset="0"/>
-                <a:ea typeface="Pretendard" pitchFamily="34" charset="-127"/>
+                <a:ea typeface="Pretendard" pitchFamily="34" charset="-122"/>
                 <a:cs typeface="Pretendard" pitchFamily="34" charset="-120"/>
               </a:rPr>
               <a:t>1인 월평균</a:t>
@@ -7426,7 +7375,7 @@
                   <a:srgbClr val="4C574F"/>
                 </a:solidFill>
                 <a:latin typeface="Pretendard" pitchFamily="34" charset="0"/>
-                <a:ea typeface="Pretendard" pitchFamily="34" charset="-127"/>
+                <a:ea typeface="Pretendard" pitchFamily="34" charset="-122"/>
                 <a:cs typeface="Pretendard" pitchFamily="34" charset="-120"/>
               </a:rPr>
               <a:t>완독 권수</a:t>
@@ -7468,7 +7417,7 @@
                   <a:srgbClr val="4C574F"/>
                 </a:solidFill>
                 <a:latin typeface="Pretendard" pitchFamily="34" charset="0"/>
-                <a:ea typeface="Pretendard" pitchFamily="34" charset="-127"/>
+                <a:ea typeface="Pretendard" pitchFamily="34" charset="-122"/>
                 <a:cs typeface="Pretendard" pitchFamily="34" charset="-120"/>
               </a:rPr>
               <a:t>어휘력 진단</a:t>
@@ -7488,7 +7437,7 @@
                   <a:srgbClr val="4C574F"/>
                 </a:solidFill>
                 <a:latin typeface="Pretendard" pitchFamily="34" charset="0"/>
-                <a:ea typeface="Pretendard" pitchFamily="34" charset="-127"/>
+                <a:ea typeface="Pretendard" pitchFamily="34" charset="-122"/>
                 <a:cs typeface="Pretendard" pitchFamily="34" charset="-120"/>
               </a:rPr>
               <a:t>평균 정답률</a:t>
@@ -7530,7 +7479,7 @@
                   <a:srgbClr val="4C574F"/>
                 </a:solidFill>
                 <a:latin typeface="Pretendard" pitchFamily="34" charset="0"/>
-                <a:ea typeface="Pretendard" pitchFamily="34" charset="-127"/>
+                <a:ea typeface="Pretendard" pitchFamily="34" charset="-122"/>
                 <a:cs typeface="Pretendard" pitchFamily="34" charset="-120"/>
               </a:rPr>
               <a:t>「천천히 다지기」</a:t>
@@ -7550,7 +7499,7 @@
                   <a:srgbClr val="4C574F"/>
                 </a:solidFill>
                 <a:latin typeface="Pretendard" pitchFamily="34" charset="0"/>
-                <a:ea typeface="Pretendard" pitchFamily="34" charset="-127"/>
+                <a:ea typeface="Pretendard" pitchFamily="34" charset="-122"/>
                 <a:cs typeface="Pretendard" pitchFamily="34" charset="-120"/>
               </a:rPr>
               <a:t>학생 비율</a:t>
@@ -7592,7 +7541,7 @@
                   <a:srgbClr val="4C574F"/>
                 </a:solidFill>
                 <a:latin typeface="Pretendard" pitchFamily="34" charset="0"/>
-                <a:ea typeface="Pretendard" pitchFamily="34" charset="-127"/>
+                <a:ea typeface="Pretendard" pitchFamily="34" charset="-122"/>
                 <a:cs typeface="Pretendard" pitchFamily="34" charset="-120"/>
               </a:rPr>
               <a:t>공공 독서교육 계약</a:t>
@@ -7634,7 +7583,7 @@
                   <a:srgbClr val="4C574F"/>
                 </a:solidFill>
                 <a:latin typeface="Pretendard" pitchFamily="34" charset="0"/>
-                <a:ea typeface="Pretendard" pitchFamily="34" charset="-127"/>
+                <a:ea typeface="Pretendard" pitchFamily="34" charset="-122"/>
                 <a:cs typeface="Pretendard" pitchFamily="34" charset="-120"/>
               </a:rPr>
               <a:t>누적 계약 금액</a:t>
@@ -7676,7 +7625,7 @@
                   <a:srgbClr val="4C574F"/>
                 </a:solidFill>
                 <a:latin typeface="Pretendard" pitchFamily="34" charset="0"/>
-                <a:ea typeface="Pretendard" pitchFamily="34" charset="-127"/>
+                <a:ea typeface="Pretendard" pitchFamily="34" charset="-122"/>
                 <a:cs typeface="Pretendard" pitchFamily="34" charset="-120"/>
               </a:rPr>
               <a:t>소규모, 6학급 이하</a:t>
@@ -7718,7 +7667,7 @@
                   <a:srgbClr val="FFFFFF"/>
                 </a:solidFill>
                 <a:latin typeface="Pretendard" pitchFamily="34" charset="0"/>
-                <a:ea typeface="Pretendard" pitchFamily="34" charset="-127"/>
+                <a:ea typeface="Pretendard" pitchFamily="34" charset="-122"/>
                 <a:cs typeface="Pretendard" pitchFamily="34" charset="-120"/>
               </a:rPr>
               <a:t>표준, 7~18학급</a:t>
@@ -7760,7 +7709,7 @@
                   <a:srgbClr val="1D3A2A"/>
                 </a:solidFill>
                 <a:latin typeface="Pretendard ExtraBold" pitchFamily="34" charset="0"/>
-                <a:ea typeface="Pretendard ExtraBold" pitchFamily="34" charset="-127"/>
+                <a:ea typeface="Pretendard ExtraBold" pitchFamily="34" charset="-122"/>
                 <a:cs typeface="Pretendard ExtraBold" pitchFamily="34" charset="-120"/>
               </a:rPr>
               <a:t>71</a:t>
@@ -7777,7 +7726,7 @@
                   <a:srgbClr val="1D3A2A"/>
                 </a:solidFill>
                 <a:latin typeface="Pretendard" pitchFamily="34" charset="0"/>
-                <a:ea typeface="Pretendard" pitchFamily="34" charset="-127"/>
+                <a:ea typeface="Pretendard" pitchFamily="34" charset="-122"/>
                 <a:cs typeface="Pretendard" pitchFamily="34" charset="-120"/>
               </a:rPr>
               <a:t>%</a:t>
@@ -7819,7 +7768,7 @@
                   <a:srgbClr val="2E7A4E"/>
                 </a:solidFill>
                 <a:latin typeface="Pretendard ExtraBold" pitchFamily="34" charset="0"/>
-                <a:ea typeface="Pretendard ExtraBold" pitchFamily="34" charset="-127"/>
+                <a:ea typeface="Pretendard ExtraBold" pitchFamily="34" charset="-122"/>
                 <a:cs typeface="Pretendard ExtraBold" pitchFamily="34" charset="-120"/>
               </a:rPr>
               <a:t>특허 등록</a:t>
@@ -7861,7 +7810,7 @@
                   <a:srgbClr val="1D3A2A"/>
                 </a:solidFill>
                 <a:latin typeface="Pretendard ExtraBold" pitchFamily="34" charset="0"/>
-                <a:ea typeface="Pretendard ExtraBold" pitchFamily="34" charset="-127"/>
+                <a:ea typeface="Pretendard ExtraBold" pitchFamily="34" charset="-122"/>
                 <a:cs typeface="Pretendard ExtraBold" pitchFamily="34" charset="-120"/>
               </a:rPr>
               <a:t>1,500</a:t>
@@ -7878,7 +7827,7 @@
                   <a:srgbClr val="1D3A2A"/>
                 </a:solidFill>
                 <a:latin typeface="Pretendard" pitchFamily="34" charset="0"/>
-                <a:ea typeface="Pretendard" pitchFamily="34" charset="-127"/>
+                <a:ea typeface="Pretendard" pitchFamily="34" charset="-122"/>
                 <a:cs typeface="Pretendard" pitchFamily="34" charset="-120"/>
               </a:rPr>
               <a:t>만 원</a:t>
@@ -7920,7 +7869,7 @@
                   <a:srgbClr val="1D3A2A"/>
                 </a:solidFill>
                 <a:latin typeface="Pretendard ExtraBold" pitchFamily="34" charset="0"/>
-                <a:ea typeface="Pretendard ExtraBold" pitchFamily="34" charset="-127"/>
+                <a:ea typeface="Pretendard ExtraBold" pitchFamily="34" charset="-122"/>
                 <a:cs typeface="Pretendard ExtraBold" pitchFamily="34" charset="-120"/>
               </a:rPr>
               <a:t>2,000</a:t>
@@ -7937,7 +7886,7 @@
                   <a:srgbClr val="1D3A2A"/>
                 </a:solidFill>
                 <a:latin typeface="Pretendard" pitchFamily="34" charset="0"/>
-                <a:ea typeface="Pretendard" pitchFamily="34" charset="-127"/>
+                <a:ea typeface="Pretendard" pitchFamily="34" charset="-122"/>
                 <a:cs typeface="Pretendard" pitchFamily="34" charset="-120"/>
               </a:rPr>
               <a:t>만 원</a:t>
@@ -7979,7 +7928,7 @@
                   <a:srgbClr val="2E7A4E"/>
                 </a:solidFill>
                 <a:latin typeface="Pretendard ExtraBold" pitchFamily="34" charset="0"/>
-                <a:ea typeface="Pretendard ExtraBold" pitchFamily="34" charset="-127"/>
+                <a:ea typeface="Pretendard ExtraBold" pitchFamily="34" charset="-122"/>
                 <a:cs typeface="Pretendard ExtraBold" pitchFamily="34" charset="-120"/>
               </a:rPr>
               <a:t>90%</a:t>
@@ -8021,7 +7970,7 @@
                   <a:srgbClr val="2E7A4E"/>
                 </a:solidFill>
                 <a:latin typeface="Pretendard ExtraBold" pitchFamily="34" charset="0"/>
-                <a:ea typeface="Pretendard ExtraBold" pitchFamily="34" charset="-127"/>
+                <a:ea typeface="Pretendard ExtraBold" pitchFamily="34" charset="-122"/>
                 <a:cs typeface="Pretendard ExtraBold" pitchFamily="34" charset="-120"/>
               </a:rPr>
               <a:t>80%</a:t>
@@ -8063,7 +8012,7 @@
                   <a:srgbClr val="2E7A4E"/>
                 </a:solidFill>
                 <a:latin typeface="Pretendard ExtraBold" pitchFamily="34" charset="0"/>
-                <a:ea typeface="Pretendard ExtraBold" pitchFamily="34" charset="-127"/>
+                <a:ea typeface="Pretendard ExtraBold" pitchFamily="34" charset="-122"/>
                 <a:cs typeface="Pretendard ExtraBold" pitchFamily="34" charset="-120"/>
               </a:rPr>
               <a:t>90% 이상</a:t>
@@ -8105,7 +8054,7 @@
                   <a:srgbClr val="4C574F"/>
                 </a:solidFill>
                 <a:latin typeface="Pretendard" pitchFamily="34" charset="0"/>
-                <a:ea typeface="Pretendard" pitchFamily="34" charset="-127"/>
+                <a:ea typeface="Pretendard" pitchFamily="34" charset="-122"/>
                 <a:cs typeface="Pretendard" pitchFamily="34" charset="-120"/>
               </a:rPr>
               <a:t>다시 맡긴 발주 기관</a:t>
@@ -8147,7 +8096,7 @@
                   <a:srgbClr val="4C574F"/>
                 </a:solidFill>
                 <a:latin typeface="Pretendard" pitchFamily="34" charset="0"/>
-                <a:ea typeface="Pretendard" pitchFamily="34" charset="-127"/>
+                <a:ea typeface="Pretendard" pitchFamily="34" charset="-122"/>
                 <a:cs typeface="Pretendard" pitchFamily="34" charset="-120"/>
               </a:rPr>
               <a:t>캐릭터와 대화 기술</a:t>
@@ -8189,7 +8138,7 @@
                   <a:srgbClr val="4C574F"/>
                 </a:solidFill>
                 <a:latin typeface="Pretendard" pitchFamily="34" charset="0"/>
-                <a:ea typeface="Pretendard" pitchFamily="34" charset="-127"/>
+                <a:ea typeface="Pretendard" pitchFamily="34" charset="-122"/>
                 <a:cs typeface="Pretendard" pitchFamily="34" charset="-120"/>
               </a:rPr>
               <a:t>중대규모, 19~30학급</a:t>
@@ -8231,7 +8180,7 @@
                   <a:srgbClr val="4C574F"/>
                 </a:solidFill>
                 <a:latin typeface="Pretendard" pitchFamily="34" charset="0"/>
-                <a:ea typeface="Pretendard" pitchFamily="34" charset="-127"/>
+                <a:ea typeface="Pretendard" pitchFamily="34" charset="-122"/>
                 <a:cs typeface="Pretendard" pitchFamily="34" charset="-120"/>
               </a:rPr>
               <a:t>대규모, 31학급 이상</a:t>
@@ -8273,7 +8222,7 @@
                   <a:srgbClr val="4C574F"/>
                 </a:solidFill>
                 <a:latin typeface="Pretendard" pitchFamily="34" charset="0"/>
-                <a:ea typeface="Pretendard" pitchFamily="34" charset="-127"/>
+                <a:ea typeface="Pretendard" pitchFamily="34" charset="-122"/>
                 <a:cs typeface="Pretendard" pitchFamily="34" charset="-120"/>
               </a:rPr>
               <a:t>독후활동과</a:t>
@@ -8293,7 +8242,7 @@
                   <a:srgbClr val="4C574F"/>
                 </a:solidFill>
                 <a:latin typeface="Pretendard" pitchFamily="34" charset="0"/>
-                <a:ea typeface="Pretendard" pitchFamily="34" charset="-127"/>
+                <a:ea typeface="Pretendard" pitchFamily="34" charset="-122"/>
                 <a:cs typeface="Pretendard" pitchFamily="34" charset="-120"/>
               </a:rPr>
               <a:t>인물 대화 참여</a:t>
@@ -8335,7 +8284,7 @@
                   <a:srgbClr val="4C574F"/>
                 </a:solidFill>
                 <a:latin typeface="Pretendard" pitchFamily="34" charset="0"/>
-                <a:ea typeface="Pretendard" pitchFamily="34" charset="-127"/>
+                <a:ea typeface="Pretendard" pitchFamily="34" charset="-122"/>
                 <a:cs typeface="Pretendard" pitchFamily="34" charset="-120"/>
               </a:rPr>
               <a:t>독서수업</a:t>
@@ -8355,7 +8304,7 @@
                   <a:srgbClr val="4C574F"/>
                 </a:solidFill>
                 <a:latin typeface="Pretendard" pitchFamily="34" charset="0"/>
-                <a:ea typeface="Pretendard" pitchFamily="34" charset="-127"/>
+                <a:ea typeface="Pretendard" pitchFamily="34" charset="-122"/>
                 <a:cs typeface="Pretendard" pitchFamily="34" charset="-120"/>
               </a:rPr>
               <a:t>운영 학급</a:t>
@@ -8397,7 +8346,7 @@
                   <a:srgbClr val="4C574F"/>
                 </a:solidFill>
                 <a:latin typeface="Pretendard" pitchFamily="34" charset="0"/>
-                <a:ea typeface="Pretendard" pitchFamily="34" charset="-127"/>
+                <a:ea typeface="Pretendard" pitchFamily="34" charset="-122"/>
                 <a:cs typeface="Pretendard" pitchFamily="34" charset="-120"/>
               </a:rPr>
               <a:t>학생, 교사</a:t>
@@ -8417,7 +8366,7 @@
                   <a:srgbClr val="4C574F"/>
                 </a:solidFill>
                 <a:latin typeface="Pretendard" pitchFamily="34" charset="0"/>
-                <a:ea typeface="Pretendard" pitchFamily="34" charset="-127"/>
+                <a:ea typeface="Pretendard" pitchFamily="34" charset="-122"/>
                 <a:cs typeface="Pretendard" pitchFamily="34" charset="-120"/>
               </a:rPr>
               <a:t>만족도</a:t>
@@ -8459,7 +8408,7 @@
                   <a:srgbClr val="1D3A2A"/>
                 </a:solidFill>
                 <a:latin typeface="Pretendard" pitchFamily="34" charset="0"/>
-                <a:ea typeface="Pretendard" pitchFamily="34" charset="-127"/>
+                <a:ea typeface="Pretendard" pitchFamily="34" charset="-122"/>
                 <a:cs typeface="Pretendard" pitchFamily="34" charset="-120"/>
               </a:rPr>
               <a:t>정보 보호</a:t>
@@ -8479,7 +8428,7 @@
                   <a:srgbClr val="4C574F"/>
                 </a:solidFill>
                 <a:latin typeface="Pretendard" pitchFamily="34" charset="0"/>
-                <a:ea typeface="Pretendard" pitchFamily="34" charset="-127"/>
+                <a:ea typeface="Pretendard" pitchFamily="34" charset="-122"/>
                 <a:cs typeface="Pretendard" pitchFamily="34" charset="-120"/>
               </a:rPr>
               <a:t>무보관(ZDR)을 적용해, AI로 보낸 글은 처리 뒤 남지 않고 AI 학습에도 쓰이지 않습니다.</a:t>
@@ -8521,7 +8470,7 @@
                   <a:srgbClr val="4C574F"/>
                 </a:solidFill>
                 <a:latin typeface="Pretendard" pitchFamily="34" charset="0"/>
-                <a:ea typeface="Pretendard" pitchFamily="34" charset="-127"/>
+                <a:ea typeface="Pretendard" pitchFamily="34" charset="-122"/>
                 <a:cs typeface="Pretendard" pitchFamily="34" charset="-120"/>
               </a:rPr>
               <a:t>보호자 동의를 확인해 학생 계정을 만들고, 통계는 이름 없는 합계로만 내려받습니다. 부기의 AI 기능은 OpenAI와 Anthropic(Claude) API로 운영합니다. 두 사업자 모두 데이터</a:t>
@@ -8563,10 +8512,10 @@
                   <a:srgbClr val="7B847D"/>
                 </a:solidFill>
                 <a:latin typeface="Pretendard" pitchFamily="34" charset="0"/>
-                <a:ea typeface="Pretendard" pitchFamily="34" charset="-127"/>
-                <a:cs typeface="Pretendard" pitchFamily="34" charset="-120"/>
-              </a:rPr>
-              <a:t>출처: OECD PISA 2025 결과 보도(2026. 9.), 2022년 값은 교육부와 한국교육과정평가원(2023. 12.), 교원 인식은 한국교총(2024. 10.), 독서 긍정 인식은 문화체육관광부 「2023년 국민독서실태조사」, 정책과 예산은</a:t>
+                <a:ea typeface="Pretendard" pitchFamily="34" charset="-122"/>
+                <a:cs typeface="Pretendard" pitchFamily="34" charset="-120"/>
+              </a:rPr>
+              <a:t>출처: OECD PISA 2025 결과 보도(2026. 9.), 2022년 값은 교육부와 한국교육과정평가원(2023. 12.), 교원 인식은 한국교총(2024. 10.), 독서 긍정 인식은 문화체육관광부 「2023년 국민독서실태조사」, 정책은</a:t>
             </a:r>
             <a:endParaRPr lang="en-US" sz="610" dirty="0"/>
           </a:p>
@@ -8583,7 +8532,7 @@
                   <a:srgbClr val="7B847D"/>
                 </a:solidFill>
                 <a:latin typeface="Pretendard" pitchFamily="34" charset="0"/>
-                <a:ea typeface="Pretendard" pitchFamily="34" charset="-127"/>
+                <a:ea typeface="Pretendard" pitchFamily="34" charset="-122"/>
                 <a:cs typeface="Pretendard" pitchFamily="34" charset="-120"/>
               </a:rPr>
               <a:t>교육부 「학교 독서교육 활성화 방안」(2026. 7. 2.). 운영 결과는 선도교사단 72학급 온오프라인 운영 결과 종합. 교사 의견은 홍보 사용에 동의한 후기 원문. 사업비와 성과 목표는 안이며 참여 학교 수와 학급 규모가 정해지면</a:t>
@@ -8625,7 +8574,7 @@
                   <a:srgbClr val="7B847D"/>
                 </a:solidFill>
                 <a:latin typeface="Pretendard" pitchFamily="34" charset="0"/>
-                <a:ea typeface="Pretendard" pitchFamily="34" charset="-127"/>
+                <a:ea typeface="Pretendard" pitchFamily="34" charset="-122"/>
                 <a:cs typeface="Pretendard" pitchFamily="34" charset="-120"/>
               </a:rPr>
               <a:t>교육청과 협의해 확정. 수행 실적은 2018~2026년 제안기관 집계(관계사 포함, 발주 기관 65곳 가운데 46곳)이며 실적증명서로 제출. 특허 「아바타 기반 도서 등장인물 대화형 독서활동」. 자세한 내용은 부기 통합운영 제안서</a:t>
@@ -8645,10 +8594,10 @@
                   <a:srgbClr val="7B847D"/>
                 </a:solidFill>
                 <a:latin typeface="Pretendard" pitchFamily="34" charset="0"/>
-                <a:ea typeface="Pretendard" pitchFamily="34" charset="-127"/>
-                <a:cs typeface="Pretendard" pitchFamily="34" charset="-120"/>
-              </a:rPr>
-              <a:t>(43쪽).</a:t>
+                <a:ea typeface="Pretendard" pitchFamily="34" charset="-122"/>
+                <a:cs typeface="Pretendard" pitchFamily="34" charset="-120"/>
+              </a:rPr>
+              <a:t>(44쪽).</a:t>
             </a:r>
             <a:endParaRPr lang="en-US" sz="610" dirty="0"/>
           </a:p>
@@ -8687,7 +8636,7 @@
                   <a:srgbClr val="F2D58A"/>
                 </a:solidFill>
                 <a:latin typeface="Pretendard" pitchFamily="34" charset="0"/>
-                <a:ea typeface="Pretendard" pitchFamily="34" charset="-127"/>
+                <a:ea typeface="Pretendard" pitchFamily="34" charset="-122"/>
                 <a:cs typeface="Pretendard" pitchFamily="34" charset="-120"/>
               </a:rPr>
               <a:t>부기 누리집 </a:t>
@@ -8704,7 +8653,7 @@
                   <a:srgbClr val="FFFFFF"/>
                 </a:solidFill>
                 <a:latin typeface="Pretendard Black" pitchFamily="34" charset="0"/>
-                <a:ea typeface="Pretendard Black" pitchFamily="34" charset="-127"/>
+                <a:ea typeface="Pretendard Black" pitchFamily="34" charset="-122"/>
                 <a:cs typeface="Pretendard Black" pitchFamily="34" charset="-120"/>
               </a:rPr>
               <a:t>bookie.io.kr</a:t>
@@ -8746,7 +8695,7 @@
                   <a:srgbClr val="DFE8E1"/>
                 </a:solidFill>
                 <a:latin typeface="Pretendard" pitchFamily="34" charset="0"/>
-                <a:ea typeface="Pretendard" pitchFamily="34" charset="-127"/>
+                <a:ea typeface="Pretendard" pitchFamily="34" charset="-122"/>
                 <a:cs typeface="Pretendard" pitchFamily="34" charset="-120"/>
               </a:rPr>
               <a:t>주식회사 엠에스이씨엠(MSECM)</a:t>
@@ -8788,7 +8737,7 @@
                   <a:srgbClr val="DFE8E1"/>
                 </a:solidFill>
                 <a:latin typeface="Pretendard" pitchFamily="34" charset="0"/>
-                <a:ea typeface="Pretendard" pitchFamily="34" charset="-127"/>
+                <a:ea typeface="Pretendard" pitchFamily="34" charset="-122"/>
                 <a:cs typeface="Pretendard" pitchFamily="34" charset="-120"/>
               </a:rPr>
               <a:t>문의 이예진</a:t>
@@ -8830,7 +8779,7 @@
                   <a:srgbClr val="DFE8E1"/>
                 </a:solidFill>
                 <a:latin typeface="Pretendard" pitchFamily="34" charset="0"/>
-                <a:ea typeface="Pretendard" pitchFamily="34" charset="-127"/>
+                <a:ea typeface="Pretendard" pitchFamily="34" charset="-122"/>
                 <a:cs typeface="Pretendard" pitchFamily="34" charset="-120"/>
               </a:rPr>
               <a:t>T. 055-715-8854</a:t>
@@ -8872,7 +8821,7 @@
                   <a:srgbClr val="DFE8E1"/>
                 </a:solidFill>
                 <a:latin typeface="Pretendard" pitchFamily="34" charset="0"/>
-                <a:ea typeface="Pretendard" pitchFamily="34" charset="-127"/>
+                <a:ea typeface="Pretendard" pitchFamily="34" charset="-122"/>
                 <a:cs typeface="Pretendard" pitchFamily="34" charset="-120"/>
               </a:rPr>
               <a:t>E. yeajin@msecm.co.kr</a:t>

--- a/promo/dl/proposal/bookie-proposal-summary-1p.pptx
+++ b/promo/dl/proposal/bookie-proposal-summary-1p.pptx
@@ -4772,7 +4772,7 @@
                 <a:ea typeface="Pretendard" pitchFamily="34" charset="-122"/>
                 <a:cs typeface="Pretendard" pitchFamily="34" charset="-120"/>
               </a:rPr>
-              <a:t>학급 고민에 맞는 책과 질문을 고릅니다.</a:t>
+              <a:t>학급 고민에서 책과 질문을 고릅니다.</a:t>
             </a:r>
             <a:endParaRPr lang="en-US" sz="780" dirty="0"/>
           </a:p>
@@ -4792,7 +4792,7 @@
                 <a:ea typeface="Pretendard" pitchFamily="34" charset="-122"/>
                 <a:cs typeface="Pretendard" pitchFamily="34" charset="-120"/>
               </a:rPr>
-              <a:t>온라인 작성과 인쇄 활동지로</a:t>
+              <a:t>준비 시간을 줄이고 수업을 다듬습니다.</a:t>
             </a:r>
             <a:endParaRPr lang="en-US" sz="780" dirty="0"/>
           </a:p>
@@ -4812,7 +4812,7 @@
                 <a:ea typeface="Pretendard" pitchFamily="34" charset="-122"/>
                 <a:cs typeface="Pretendard" pitchFamily="34" charset="-120"/>
               </a:rPr>
-              <a:t>같은 수업을 운영합니다.</a:t>
+              <a:t>학생 답을 살펴 다음 수업을 고칩니다.</a:t>
             </a:r>
             <a:endParaRPr lang="en-US" sz="780" dirty="0"/>
           </a:p>
@@ -5958,24 +5958,7 @@
                 <a:ea typeface="Pretendard" pitchFamily="34" charset="-122"/>
                 <a:cs typeface="Pretendard" pitchFamily="34" charset="-120"/>
               </a:rPr>
-              <a:t>22개 학교 교사 33명이 스스로 신청해 선도교사단을 꾸렸고, </a:t>
-            </a:r>
-            <a:pPr algn="l" indent="0" marL="0">
-              <a:lnSpc>
-                <a:spcPts val="1014"/>
-              </a:lnSpc>
-              <a:buNone/>
-            </a:pPr>
-            <a:r>
-              <a:rPr lang="ko-KR" altLang="en-US" sz="780" b="1" spc="-1" kern="0" dirty="0">
-                <a:solidFill>
-                  <a:srgbClr val="1D3A2A"/>
-                </a:solidFill>
-                <a:latin typeface="Pretendard" pitchFamily="34" charset="0"/>
-                <a:ea typeface="Pretendard" pitchFamily="34" charset="-122"/>
-                <a:cs typeface="Pretendard" pitchFamily="34" charset="-120"/>
-              </a:rPr>
-              <a:t>12월에 선도교사단을 300개 학교로 넓힙니다.</a:t>
+              <a:t>경상남도 내 초등학교 30곳의 선도교사단과 수업을 운영하며 현장 의견을 반영합니다.</a:t>
             </a:r>
             <a:endParaRPr lang="en-US" sz="780" dirty="0"/>
           </a:p>

--- a/promo/dl/proposal/bookie-proposal-summary-1p.pptx
+++ b/promo/dl/proposal/bookie-proposal-summary-1p.pptx
@@ -3060,7 +3060,7 @@
                 <a:ea typeface="Pretendard ExtraBold" pitchFamily="34" charset="-122"/>
                 <a:cs typeface="Pretendard ExtraBold" pitchFamily="34" charset="-120"/>
               </a:rPr>
-              <a:t>통합운영 제안서 한 장 요약</a:t>
+              <a:t>위탁운영 제안서 한 장 요약</a:t>
             </a:r>
             <a:endParaRPr lang="en-US" sz="1050" dirty="0"/>
           </a:p>
@@ -3186,7 +3186,7 @@
                 <a:ea typeface="Pretendard" pitchFamily="34" charset="-122"/>
                 <a:cs typeface="Pretendard" pitchFamily="34" charset="-120"/>
               </a:rPr>
-              <a:t>초등 독서교육 플랫폼 부기(BOOKIE) 기반</a:t>
+              <a:t>독서수업 프로그램 부기(BOOKIE) 기반</a:t>
             </a:r>
             <a:endParaRPr lang="en-US" sz="820" dirty="0"/>
           </a:p>
@@ -3604,7 +3604,7 @@
                 <a:ea typeface="Pretendard" pitchFamily="34" charset="-122"/>
                 <a:cs typeface="Pretendard" pitchFamily="34" charset="-120"/>
               </a:rPr>
-              <a:t>초등 디지털 독서교육 플랫폼 기반 온라인 독서교육 통합운영 사업</a:t>
+              <a:t>독서수업 프로그램 부기 기반 독서교육 위탁운영 사업</a:t>
             </a:r>
             <a:endParaRPr lang="en-US" sz="799" dirty="0"/>
           </a:p>
@@ -3972,7 +3972,7 @@
                 <a:ea typeface="Pretendard" pitchFamily="34" charset="-122"/>
                 <a:cs typeface="Pretendard" pitchFamily="34" charset="-120"/>
               </a:rPr>
-              <a:t>부기 300권과 차시 자료, 어휘력 진단, 교원 연수, 운영지원, 성과 보고</a:t>
+              <a:t>부기 서비스 6가지, 교원 연수, 학교별 운영관리 10개 항목, 성과 보고</a:t>
             </a:r>
             <a:endParaRPr lang="en-US" sz="799" dirty="0"/>
           </a:p>
@@ -4056,7 +4056,7 @@
                 <a:ea typeface="Pretendard" pitchFamily="34" charset="-122"/>
                 <a:cs typeface="Pretendard" pitchFamily="34" charset="-120"/>
               </a:rPr>
-              <a:t>플랫폼 운영형 또는 교육강사가 찾아가는 위탁 운영형 가운데 고름</a:t>
+              <a:t>독서교육 위탁운영(플랫폼, 연수, 학교별 운영관리, 성과 보고)</a:t>
             </a:r>
             <a:endParaRPr lang="en-US" sz="799" dirty="0"/>
           </a:p>
@@ -4871,7 +4871,7 @@
                 <a:ea typeface="Pretendard" pitchFamily="34" charset="-122"/>
                 <a:cs typeface="Pretendard" pitchFamily="34" charset="-120"/>
               </a:rPr>
-              <a:t>월간, 분기,</a:t>
+              <a:t>월간, 학기별,</a:t>
             </a:r>
             <a:endParaRPr lang="en-US" sz="780" dirty="0"/>
           </a:p>
@@ -4891,7 +4891,7 @@
                 <a:ea typeface="Pretendard" pitchFamily="34" charset="-122"/>
                 <a:cs typeface="Pretendard" pitchFamily="34" charset="-120"/>
               </a:rPr>
-              <a:t>종료 3회</a:t>
+              <a:t>연간</a:t>
             </a:r>
             <a:pPr algn="l" indent="0" marL="0">
               <a:lnSpc>
@@ -5148,7 +5148,7 @@
                 <a:ea typeface="Pretendard" pitchFamily="34" charset="-122"/>
                 <a:cs typeface="Pretendard" pitchFamily="34" charset="-120"/>
               </a:rPr>
-              <a:t>독후활동 40종</a:t>
+              <a:t>활동 카드 9가지</a:t>
             </a:r>
             <a:pPr algn="l" indent="0" marL="0">
               <a:lnSpc>
@@ -8560,7 +8560,7 @@
                 <a:ea typeface="Pretendard" pitchFamily="34" charset="-122"/>
                 <a:cs typeface="Pretendard" pitchFamily="34" charset="-120"/>
               </a:rPr>
-              <a:t>교육청과 협의해 확정. 수행 실적은 2018~2026년 제안기관 집계(관계사 포함, 발주 기관 65곳 가운데 46곳)이며 실적증명서로 제출. 특허 「아바타 기반 도서 등장인물 대화형 독서활동」. 자세한 내용은 부기 통합운영 제안서</a:t>
+              <a:t>교육청과 협의해 확정. 수행 실적은 2018~2026년 제안기관 집계(관계사 포함, 발주 기관 65곳 가운데 46곳)이며 실적증명서로 제출. 특허 「아바타 기반 도서 등장인물 대화형 독서활동」. 자세한 내용은 부기 위탁운영 제안서</a:t>
             </a:r>
             <a:endParaRPr lang="en-US" sz="610" dirty="0"/>
           </a:p>
@@ -8580,7 +8580,7 @@
                 <a:ea typeface="Pretendard" pitchFamily="34" charset="-122"/>
                 <a:cs typeface="Pretendard" pitchFamily="34" charset="-120"/>
               </a:rPr>
-              <a:t>(44쪽).</a:t>
+              <a:t>(47쪽).</a:t>
             </a:r>
             <a:endParaRPr lang="en-US" sz="610" dirty="0"/>
           </a:p>

--- a/promo/dl/proposal/bookie-proposal-summary-1p.pptx
+++ b/promo/dl/proposal/bookie-proposal-summary-1p.pptx
@@ -3057,7 +3057,7 @@
                   <a:srgbClr val="F2D58A"/>
                 </a:solidFill>
                 <a:latin typeface="Pretendard ExtraBold" pitchFamily="34" charset="0"/>
-                <a:ea typeface="Pretendard ExtraBold" pitchFamily="34" charset="-122"/>
+                <a:ea typeface="Pretendard ExtraBold" pitchFamily="34" charset="-127"/>
                 <a:cs typeface="Pretendard ExtraBold" pitchFamily="34" charset="-120"/>
               </a:rPr>
               <a:t>위탁운영 제안서 한 장 요약</a:t>
@@ -3099,7 +3099,7 @@
                   <a:srgbClr val="C9D6CC"/>
                 </a:solidFill>
                 <a:latin typeface="Noto Serif KR" pitchFamily="34" charset="0"/>
-                <a:ea typeface="Noto Serif KR" pitchFamily="34" charset="-122"/>
+                <a:ea typeface="Noto Serif KR" pitchFamily="34" charset="-127"/>
                 <a:cs typeface="Noto Serif KR" pitchFamily="34" charset="-120"/>
               </a:rPr>
               <a:t>bookie</a:t>
@@ -3141,7 +3141,7 @@
                   <a:srgbClr val="FFFFFF"/>
                 </a:solidFill>
                 <a:latin typeface="Noto Serif KR" pitchFamily="34" charset="0"/>
-                <a:ea typeface="Noto Serif KR" pitchFamily="34" charset="-122"/>
+                <a:ea typeface="Noto Serif KR" pitchFamily="34" charset="-127"/>
                 <a:cs typeface="Noto Serif KR" pitchFamily="34" charset="-120"/>
               </a:rPr>
               <a:t>부기</a:t>
@@ -3183,7 +3183,7 @@
                   <a:srgbClr val="C9D6CC"/>
                 </a:solidFill>
                 <a:latin typeface="Pretendard" pitchFamily="34" charset="0"/>
-                <a:ea typeface="Pretendard" pitchFamily="34" charset="-122"/>
+                <a:ea typeface="Pretendard" pitchFamily="34" charset="-127"/>
                 <a:cs typeface="Pretendard" pitchFamily="34" charset="-120"/>
               </a:rPr>
               <a:t>독서수업 프로그램 부기(BOOKIE) 기반</a:t>
@@ -3225,7 +3225,7 @@
                   <a:srgbClr val="C9D6CC"/>
                 </a:solidFill>
                 <a:latin typeface="Pretendard" pitchFamily="34" charset="0"/>
-                <a:ea typeface="Pretendard" pitchFamily="34" charset="-122"/>
+                <a:ea typeface="Pretendard" pitchFamily="34" charset="-127"/>
                 <a:cs typeface="Pretendard" pitchFamily="34" charset="-120"/>
               </a:rPr>
               <a:t>2026. 10.</a:t>
@@ -3267,7 +3267,7 @@
                   <a:srgbClr val="FFFFFF"/>
                 </a:solidFill>
                 <a:latin typeface="Noto Serif KR Black" pitchFamily="34" charset="0"/>
-                <a:ea typeface="Noto Serif KR Black" pitchFamily="34" charset="-122"/>
+                <a:ea typeface="Noto Serif KR Black" pitchFamily="34" charset="-127"/>
                 <a:cs typeface="Noto Serif KR Black" pitchFamily="34" charset="-120"/>
               </a:rPr>
               <a:t>책과 이야기하며</a:t>
@@ -3287,7 +3287,7 @@
                   <a:srgbClr val="F2D58A"/>
                 </a:solidFill>
                 <a:latin typeface="Noto Serif KR Black" pitchFamily="34" charset="0"/>
-                <a:ea typeface="Noto Serif KR Black" pitchFamily="34" charset="-122"/>
+                <a:ea typeface="Noto Serif KR Black" pitchFamily="34" charset="-127"/>
                 <a:cs typeface="Noto Serif KR Black" pitchFamily="34" charset="-120"/>
               </a:rPr>
               <a:t>스스로 생각하는 아이로</a:t>
@@ -3329,7 +3329,7 @@
                   <a:srgbClr val="E3EBE5"/>
                 </a:solidFill>
                 <a:latin typeface="Pretendard" pitchFamily="34" charset="0"/>
-                <a:ea typeface="Pretendard" pitchFamily="34" charset="-122"/>
+                <a:ea typeface="Pretendard" pitchFamily="34" charset="-127"/>
                 <a:cs typeface="Pretendard" pitchFamily="34" charset="-120"/>
               </a:rPr>
               <a:t>AI의 답을 읽고 판단할 바탕은 학생이 직접 읽고 생각한 시간에서 자랍니다.</a:t>
@@ -3349,7 +3349,7 @@
                   <a:srgbClr val="E3EBE5"/>
                 </a:solidFill>
                 <a:latin typeface="Pretendard" pitchFamily="34" charset="0"/>
-                <a:ea typeface="Pretendard" pitchFamily="34" charset="-122"/>
+                <a:ea typeface="Pretendard" pitchFamily="34" charset="-127"/>
                 <a:cs typeface="Pretendard" pitchFamily="34" charset="-120"/>
               </a:rPr>
               <a:t>낯선 어휘에서 멈추지 않도록 돕고, 우리 반의 문제를 책 속 인물과 질문에 연결하는 독서수업을 제안합니다.</a:t>
@@ -3391,7 +3391,7 @@
                   <a:srgbClr val="FFFFFF"/>
                 </a:solidFill>
                 <a:latin typeface="Pretendard" pitchFamily="34" charset="0"/>
-                <a:ea typeface="Pretendard" pitchFamily="34" charset="-122"/>
+                <a:ea typeface="Pretendard" pitchFamily="34" charset="-127"/>
                 <a:cs typeface="Pretendard" pitchFamily="34" charset="-120"/>
               </a:rPr>
               <a:t>1</a:t>
@@ -3433,7 +3433,7 @@
                   <a:srgbClr val="FFFFFF"/>
                 </a:solidFill>
                 <a:latin typeface="Pretendard" pitchFamily="34" charset="0"/>
-                <a:ea typeface="Pretendard" pitchFamily="34" charset="-122"/>
+                <a:ea typeface="Pretendard" pitchFamily="34" charset="-127"/>
                 <a:cs typeface="Pretendard" pitchFamily="34" charset="-120"/>
               </a:rPr>
               <a:t>2</a:t>
@@ -3475,7 +3475,7 @@
                   <a:srgbClr val="1D3A2A"/>
                 </a:solidFill>
                 <a:latin typeface="Pretendard ExtraBold" pitchFamily="34" charset="0"/>
-                <a:ea typeface="Pretendard ExtraBold" pitchFamily="34" charset="-122"/>
+                <a:ea typeface="Pretendard ExtraBold" pitchFamily="34" charset="-127"/>
                 <a:cs typeface="Pretendard ExtraBold" pitchFamily="34" charset="-120"/>
               </a:rPr>
               <a:t>사업 개요</a:t>
@@ -3517,7 +3517,7 @@
                   <a:srgbClr val="1D3A2A"/>
                 </a:solidFill>
                 <a:latin typeface="Pretendard ExtraBold" pitchFamily="34" charset="0"/>
-                <a:ea typeface="Pretendard ExtraBold" pitchFamily="34" charset="-122"/>
+                <a:ea typeface="Pretendard ExtraBold" pitchFamily="34" charset="-127"/>
                 <a:cs typeface="Pretendard ExtraBold" pitchFamily="34" charset="-120"/>
               </a:rPr>
               <a:t>제안 배경</a:t>
@@ -3559,7 +3559,7 @@
                   <a:srgbClr val="F6ECD2"/>
                 </a:solidFill>
                 <a:latin typeface="Pretendard" pitchFamily="34" charset="0"/>
-                <a:ea typeface="Pretendard" pitchFamily="34" charset="-122"/>
+                <a:ea typeface="Pretendard" pitchFamily="34" charset="-127"/>
                 <a:cs typeface="Pretendard" pitchFamily="34" charset="-120"/>
               </a:rPr>
               <a:t>사업명</a:t>
@@ -3601,7 +3601,7 @@
                   <a:srgbClr val="24302A"/>
                 </a:solidFill>
                 <a:latin typeface="Pretendard" pitchFamily="34" charset="0"/>
-                <a:ea typeface="Pretendard" pitchFamily="34" charset="-122"/>
+                <a:ea typeface="Pretendard" pitchFamily="34" charset="-127"/>
                 <a:cs typeface="Pretendard" pitchFamily="34" charset="-120"/>
               </a:rPr>
               <a:t>독서수업 프로그램 부기 기반 독서교육 위탁운영 사업</a:t>
@@ -3643,7 +3643,7 @@
                   <a:srgbClr val="B5452F"/>
                 </a:solidFill>
                 <a:latin typeface="Pretendard ExtraBold" pitchFamily="34" charset="0"/>
-                <a:ea typeface="Pretendard ExtraBold" pitchFamily="34" charset="-122"/>
+                <a:ea typeface="Pretendard ExtraBold" pitchFamily="34" charset="-127"/>
                 <a:cs typeface="Pretendard ExtraBold" pitchFamily="34" charset="-120"/>
               </a:rPr>
               <a:t>17.8</a:t>
@@ -3660,7 +3660,7 @@
                   <a:srgbClr val="B5452F"/>
                 </a:solidFill>
                 <a:latin typeface="Pretendard" pitchFamily="34" charset="0"/>
-                <a:ea typeface="Pretendard" pitchFamily="34" charset="-122"/>
+                <a:ea typeface="Pretendard" pitchFamily="34" charset="-127"/>
                 <a:cs typeface="Pretendard" pitchFamily="34" charset="-120"/>
               </a:rPr>
               <a:t>%</a:t>
@@ -3702,7 +3702,7 @@
                   <a:srgbClr val="1D3A2A"/>
                 </a:solidFill>
                 <a:latin typeface="Pretendard ExtraBold" pitchFamily="34" charset="0"/>
-                <a:ea typeface="Pretendard ExtraBold" pitchFamily="34" charset="-122"/>
+                <a:ea typeface="Pretendard ExtraBold" pitchFamily="34" charset="-127"/>
                 <a:cs typeface="Pretendard ExtraBold" pitchFamily="34" charset="-120"/>
               </a:rPr>
               <a:t>91.8</a:t>
@@ -3719,7 +3719,7 @@
                   <a:srgbClr val="1D3A2A"/>
                 </a:solidFill>
                 <a:latin typeface="Pretendard" pitchFamily="34" charset="0"/>
-                <a:ea typeface="Pretendard" pitchFamily="34" charset="-122"/>
+                <a:ea typeface="Pretendard" pitchFamily="34" charset="-127"/>
                 <a:cs typeface="Pretendard" pitchFamily="34" charset="-120"/>
               </a:rPr>
               <a:t>%</a:t>
@@ -3761,7 +3761,7 @@
                   <a:srgbClr val="4C574F"/>
                 </a:solidFill>
                 <a:latin typeface="Pretendard" pitchFamily="34" charset="0"/>
-                <a:ea typeface="Pretendard" pitchFamily="34" charset="-122"/>
+                <a:ea typeface="Pretendard" pitchFamily="34" charset="-127"/>
                 <a:cs typeface="Pretendard" pitchFamily="34" charset="-120"/>
               </a:rPr>
               <a:t>읽기 기초 수준 미달 학생</a:t>
@@ -3781,7 +3781,7 @@
                   <a:srgbClr val="4C574F"/>
                 </a:solidFill>
                 <a:latin typeface="Pretendard" pitchFamily="34" charset="0"/>
-                <a:ea typeface="Pretendard" pitchFamily="34" charset="-122"/>
+                <a:ea typeface="Pretendard" pitchFamily="34" charset="-127"/>
                 <a:cs typeface="Pretendard" pitchFamily="34" charset="-120"/>
               </a:rPr>
               <a:t>PISA 2025(2022년 14.7%)</a:t>
@@ -3823,7 +3823,7 @@
                   <a:srgbClr val="4C574F"/>
                 </a:solidFill>
                 <a:latin typeface="Pretendard" pitchFamily="34" charset="0"/>
-                <a:ea typeface="Pretendard" pitchFamily="34" charset="-122"/>
+                <a:ea typeface="Pretendard" pitchFamily="34" charset="-127"/>
                 <a:cs typeface="Pretendard" pitchFamily="34" charset="-120"/>
               </a:rPr>
               <a:t>학생 문해력이 떨어졌다고</a:t>
@@ -3843,7 +3843,7 @@
                   <a:srgbClr val="4C574F"/>
                 </a:solidFill>
                 <a:latin typeface="Pretendard" pitchFamily="34" charset="0"/>
-                <a:ea typeface="Pretendard" pitchFamily="34" charset="-122"/>
+                <a:ea typeface="Pretendard" pitchFamily="34" charset="-127"/>
                 <a:cs typeface="Pretendard" pitchFamily="34" charset="-120"/>
               </a:rPr>
               <a:t>답한 교원(2024)</a:t>
@@ -3885,7 +3885,7 @@
                   <a:srgbClr val="24302A"/>
                 </a:solidFill>
                 <a:latin typeface="Pretendard" pitchFamily="34" charset="0"/>
-                <a:ea typeface="Pretendard" pitchFamily="34" charset="-122"/>
+                <a:ea typeface="Pretendard" pitchFamily="34" charset="-127"/>
                 <a:cs typeface="Pretendard" pitchFamily="34" charset="-120"/>
               </a:rPr>
               <a:t>교육청이 선정한 참여 초등학교 1~6학년 학생과 담당 교원</a:t>
@@ -3927,7 +3927,7 @@
                   <a:srgbClr val="F6ECD2"/>
                 </a:solidFill>
                 <a:latin typeface="Pretendard" pitchFamily="34" charset="0"/>
-                <a:ea typeface="Pretendard" pitchFamily="34" charset="-122"/>
+                <a:ea typeface="Pretendard" pitchFamily="34" charset="-127"/>
                 <a:cs typeface="Pretendard" pitchFamily="34" charset="-120"/>
               </a:rPr>
               <a:t>사업 대상</a:t>
@@ -3969,7 +3969,7 @@
                   <a:srgbClr val="24302A"/>
                 </a:solidFill>
                 <a:latin typeface="Pretendard" pitchFamily="34" charset="0"/>
-                <a:ea typeface="Pretendard" pitchFamily="34" charset="-122"/>
+                <a:ea typeface="Pretendard" pitchFamily="34" charset="-127"/>
                 <a:cs typeface="Pretendard" pitchFamily="34" charset="-120"/>
               </a:rPr>
               <a:t>부기 서비스 6가지, 교원 연수, 학교별 운영관리 10개 항목, 성과 보고</a:t>
@@ -4011,7 +4011,7 @@
                   <a:srgbClr val="F6ECD2"/>
                 </a:solidFill>
                 <a:latin typeface="Pretendard" pitchFamily="34" charset="0"/>
-                <a:ea typeface="Pretendard" pitchFamily="34" charset="-122"/>
+                <a:ea typeface="Pretendard" pitchFamily="34" charset="-127"/>
                 <a:cs typeface="Pretendard" pitchFamily="34" charset="-120"/>
               </a:rPr>
               <a:t>제공 내용</a:t>
@@ -4053,7 +4053,7 @@
                   <a:srgbClr val="24302A"/>
                 </a:solidFill>
                 <a:latin typeface="Pretendard" pitchFamily="34" charset="0"/>
-                <a:ea typeface="Pretendard" pitchFamily="34" charset="-122"/>
+                <a:ea typeface="Pretendard" pitchFamily="34" charset="-127"/>
                 <a:cs typeface="Pretendard" pitchFamily="34" charset="-120"/>
               </a:rPr>
               <a:t>독서교육 위탁운영(플랫폼, 연수, 학교별 운영관리, 성과 보고)</a:t>
@@ -4095,7 +4095,7 @@
                   <a:srgbClr val="F6ECD2"/>
                 </a:solidFill>
                 <a:latin typeface="Pretendard" pitchFamily="34" charset="0"/>
-                <a:ea typeface="Pretendard" pitchFamily="34" charset="-122"/>
+                <a:ea typeface="Pretendard" pitchFamily="34" charset="-127"/>
                 <a:cs typeface="Pretendard" pitchFamily="34" charset="-120"/>
               </a:rPr>
               <a:t>운영 방식</a:t>
@@ -4137,7 +4137,7 @@
                   <a:srgbClr val="B5452F"/>
                 </a:solidFill>
                 <a:latin typeface="Pretendard ExtraBold" pitchFamily="34" charset="0"/>
-                <a:ea typeface="Pretendard ExtraBold" pitchFamily="34" charset="-122"/>
+                <a:ea typeface="Pretendard ExtraBold" pitchFamily="34" charset="-127"/>
                 <a:cs typeface="Pretendard ExtraBold" pitchFamily="34" charset="-120"/>
               </a:rPr>
               <a:t>44.4</a:t>
@@ -4154,7 +4154,7 @@
                   <a:srgbClr val="B5452F"/>
                 </a:solidFill>
                 <a:latin typeface="Pretendard" pitchFamily="34" charset="0"/>
-                <a:ea typeface="Pretendard" pitchFamily="34" charset="-122"/>
+                <a:ea typeface="Pretendard" pitchFamily="34" charset="-127"/>
                 <a:cs typeface="Pretendard" pitchFamily="34" charset="-120"/>
               </a:rPr>
               <a:t>%</a:t>
@@ -4196,7 +4196,7 @@
                   <a:srgbClr val="2E7A4E"/>
                 </a:solidFill>
                 <a:latin typeface="Pretendard ExtraBold" pitchFamily="34" charset="0"/>
-                <a:ea typeface="Pretendard ExtraBold" pitchFamily="34" charset="-122"/>
+                <a:ea typeface="Pretendard ExtraBold" pitchFamily="34" charset="-127"/>
                 <a:cs typeface="Pretendard ExtraBold" pitchFamily="34" charset="-120"/>
               </a:rPr>
               <a:t>함께 읽기</a:t>
@@ -4238,7 +4238,7 @@
                   <a:srgbClr val="4C574F"/>
                 </a:solidFill>
                 <a:latin typeface="Pretendard" pitchFamily="34" charset="0"/>
-                <a:ea typeface="Pretendard" pitchFamily="34" charset="-122"/>
+                <a:ea typeface="Pretendard" pitchFamily="34" charset="-127"/>
                 <a:cs typeface="Pretendard" pitchFamily="34" charset="-120"/>
               </a:rPr>
               <a:t>초등학생 독서 긍정 인식</a:t>
@@ -4258,7 +4258,7 @@
                   <a:srgbClr val="4C574F"/>
                 </a:solidFill>
                 <a:latin typeface="Pretendard" pitchFamily="34" charset="0"/>
-                <a:ea typeface="Pretendard" pitchFamily="34" charset="-122"/>
+                <a:ea typeface="Pretendard" pitchFamily="34" charset="-127"/>
                 <a:cs typeface="Pretendard" pitchFamily="34" charset="-120"/>
               </a:rPr>
               <a:t>(2023, 4년 사이 6.9%p 하락)</a:t>
@@ -4300,7 +4300,7 @@
                   <a:srgbClr val="4C574F"/>
                 </a:solidFill>
                 <a:latin typeface="Pretendard" pitchFamily="34" charset="0"/>
-                <a:ea typeface="Pretendard" pitchFamily="34" charset="-122"/>
+                <a:ea typeface="Pretendard" pitchFamily="34" charset="-127"/>
                 <a:cs typeface="Pretendard" pitchFamily="34" charset="-120"/>
               </a:rPr>
               <a:t>낱말 뜻, 인물 대화, 독후 표현</a:t>
@@ -4320,7 +4320,7 @@
                   <a:srgbClr val="4C574F"/>
                 </a:solidFill>
                 <a:latin typeface="Pretendard" pitchFamily="34" charset="0"/>
-                <a:ea typeface="Pretendard" pitchFamily="34" charset="-122"/>
+                <a:ea typeface="Pretendard" pitchFamily="34" charset="-127"/>
                 <a:cs typeface="Pretendard" pitchFamily="34" charset="-120"/>
               </a:rPr>
               <a:t>우리 반의 질문으로 연결</a:t>
@@ -4362,7 +4362,7 @@
                   <a:srgbClr val="24302A"/>
                 </a:solidFill>
                 <a:latin typeface="Pretendard" pitchFamily="34" charset="0"/>
-                <a:ea typeface="Pretendard" pitchFamily="34" charset="-122"/>
+                <a:ea typeface="Pretendard" pitchFamily="34" charset="-127"/>
                 <a:cs typeface="Pretendard" pitchFamily="34" charset="-120"/>
               </a:rPr>
               <a:t>학급 규모 4개 구간 차등, </a:t>
@@ -4379,7 +4379,7 @@
                   <a:srgbClr val="2E7A4E"/>
                 </a:solidFill>
                 <a:latin typeface="Pretendard" pitchFamily="34" charset="0"/>
-                <a:ea typeface="Pretendard" pitchFamily="34" charset="-122"/>
+                <a:ea typeface="Pretendard" pitchFamily="34" charset="-127"/>
                 <a:cs typeface="Pretendard" pitchFamily="34" charset="-120"/>
               </a:rPr>
               <a:t>학교당 연 500만~2,000만 원(안)</a:t>
@@ -4421,7 +4421,7 @@
                   <a:srgbClr val="F6ECD2"/>
                 </a:solidFill>
                 <a:latin typeface="Pretendard" pitchFamily="34" charset="0"/>
-                <a:ea typeface="Pretendard" pitchFamily="34" charset="-122"/>
+                <a:ea typeface="Pretendard" pitchFamily="34" charset="-127"/>
                 <a:cs typeface="Pretendard" pitchFamily="34" charset="-120"/>
               </a:rPr>
               <a:t>사업비</a:t>
@@ -4463,7 +4463,7 @@
                   <a:srgbClr val="FFFFFF"/>
                 </a:solidFill>
                 <a:latin typeface="Pretendard" pitchFamily="34" charset="0"/>
-                <a:ea typeface="Pretendard" pitchFamily="34" charset="-122"/>
+                <a:ea typeface="Pretendard" pitchFamily="34" charset="-127"/>
                 <a:cs typeface="Pretendard" pitchFamily="34" charset="-120"/>
               </a:rPr>
               <a:t>3</a:t>
@@ -4505,7 +4505,7 @@
                   <a:srgbClr val="1D3A2A"/>
                 </a:solidFill>
                 <a:latin typeface="Pretendard ExtraBold" pitchFamily="34" charset="0"/>
-                <a:ea typeface="Pretendard ExtraBold" pitchFamily="34" charset="-122"/>
+                <a:ea typeface="Pretendard ExtraBold" pitchFamily="34" charset="-127"/>
                 <a:cs typeface="Pretendard ExtraBold" pitchFamily="34" charset="-120"/>
               </a:rPr>
               <a:t>부기 도입 효과</a:t>
@@ -4547,7 +4547,7 @@
                   <a:srgbClr val="FFFFFF"/>
                 </a:solidFill>
                 <a:latin typeface="Pretendard ExtraBold" pitchFamily="34" charset="0"/>
-                <a:ea typeface="Pretendard ExtraBold" pitchFamily="34" charset="-122"/>
+                <a:ea typeface="Pretendard ExtraBold" pitchFamily="34" charset="-127"/>
                 <a:cs typeface="Pretendard ExtraBold" pitchFamily="34" charset="-120"/>
               </a:rPr>
               <a:t>학생</a:t>
@@ -4589,7 +4589,7 @@
                   <a:srgbClr val="FFFFFF"/>
                 </a:solidFill>
                 <a:latin typeface="Pretendard ExtraBold" pitchFamily="34" charset="0"/>
-                <a:ea typeface="Pretendard ExtraBold" pitchFamily="34" charset="-122"/>
+                <a:ea typeface="Pretendard ExtraBold" pitchFamily="34" charset="-127"/>
                 <a:cs typeface="Pretendard ExtraBold" pitchFamily="34" charset="-120"/>
               </a:rPr>
               <a:t>교사</a:t>
@@ -4631,7 +4631,7 @@
                   <a:srgbClr val="FFFFFF"/>
                 </a:solidFill>
                 <a:latin typeface="Pretendard ExtraBold" pitchFamily="34" charset="0"/>
-                <a:ea typeface="Pretendard ExtraBold" pitchFamily="34" charset="-122"/>
+                <a:ea typeface="Pretendard ExtraBold" pitchFamily="34" charset="-127"/>
                 <a:cs typeface="Pretendard ExtraBold" pitchFamily="34" charset="-120"/>
               </a:rPr>
               <a:t>학교와 교육청</a:t>
@@ -4673,7 +4673,7 @@
                   <a:srgbClr val="4C574F"/>
                 </a:solidFill>
                 <a:latin typeface="Pretendard" pitchFamily="34" charset="0"/>
-                <a:ea typeface="Pretendard" pitchFamily="34" charset="-122"/>
+                <a:ea typeface="Pretendard" pitchFamily="34" charset="-127"/>
                 <a:cs typeface="Pretendard" pitchFamily="34" charset="-120"/>
               </a:rPr>
               <a:t>모르는 낱말을 눌러 뜻을 보며 </a:t>
@@ -4690,7 +4690,7 @@
                   <a:srgbClr val="24302A"/>
                 </a:solidFill>
                 <a:latin typeface="Pretendard" pitchFamily="34" charset="0"/>
-                <a:ea typeface="Pretendard" pitchFamily="34" charset="-122"/>
+                <a:ea typeface="Pretendard" pitchFamily="34" charset="-127"/>
                 <a:cs typeface="Pretendard" pitchFamily="34" charset="-120"/>
               </a:rPr>
               <a:t>학년별 50권, 모두</a:t>
@@ -4710,7 +4710,7 @@
                   <a:srgbClr val="24302A"/>
                 </a:solidFill>
                 <a:latin typeface="Pretendard" pitchFamily="34" charset="0"/>
-                <a:ea typeface="Pretendard" pitchFamily="34" charset="-122"/>
+                <a:ea typeface="Pretendard" pitchFamily="34" charset="-127"/>
                 <a:cs typeface="Pretendard" pitchFamily="34" charset="-120"/>
               </a:rPr>
               <a:t>300권</a:t>
@@ -4727,7 +4727,7 @@
                   <a:srgbClr val="4C574F"/>
                 </a:solidFill>
                 <a:latin typeface="Pretendard" pitchFamily="34" charset="0"/>
-                <a:ea typeface="Pretendard" pitchFamily="34" charset="-122"/>
+                <a:ea typeface="Pretendard" pitchFamily="34" charset="-127"/>
                 <a:cs typeface="Pretendard" pitchFamily="34" charset="-120"/>
               </a:rPr>
               <a:t>을 읽습니다.</a:t>
@@ -4769,7 +4769,7 @@
                   <a:srgbClr val="24302A"/>
                 </a:solidFill>
                 <a:latin typeface="Pretendard" pitchFamily="34" charset="0"/>
-                <a:ea typeface="Pretendard" pitchFamily="34" charset="-122"/>
+                <a:ea typeface="Pretendard" pitchFamily="34" charset="-127"/>
                 <a:cs typeface="Pretendard" pitchFamily="34" charset="-120"/>
               </a:rPr>
               <a:t>학급 고민에서 책과 질문을 고릅니다.</a:t>
@@ -4789,7 +4789,7 @@
                   <a:srgbClr val="24302A"/>
                 </a:solidFill>
                 <a:latin typeface="Pretendard" pitchFamily="34" charset="0"/>
-                <a:ea typeface="Pretendard" pitchFamily="34" charset="-122"/>
+                <a:ea typeface="Pretendard" pitchFamily="34" charset="-127"/>
                 <a:cs typeface="Pretendard" pitchFamily="34" charset="-120"/>
               </a:rPr>
               <a:t>준비 시간을 줄이고 수업을 다듬습니다.</a:t>
@@ -4809,7 +4809,7 @@
                   <a:srgbClr val="24302A"/>
                 </a:solidFill>
                 <a:latin typeface="Pretendard" pitchFamily="34" charset="0"/>
-                <a:ea typeface="Pretendard" pitchFamily="34" charset="-122"/>
+                <a:ea typeface="Pretendard" pitchFamily="34" charset="-127"/>
                 <a:cs typeface="Pretendard" pitchFamily="34" charset="-120"/>
               </a:rPr>
               <a:t>학생 답을 살펴 다음 수업을 고칩니다.</a:t>
@@ -4851,7 +4851,7 @@
                   <a:srgbClr val="4C574F"/>
                 </a:solidFill>
                 <a:latin typeface="Pretendard" pitchFamily="34" charset="0"/>
-                <a:ea typeface="Pretendard" pitchFamily="34" charset="-122"/>
+                <a:ea typeface="Pretendard" pitchFamily="34" charset="-127"/>
                 <a:cs typeface="Pretendard" pitchFamily="34" charset="-120"/>
               </a:rPr>
               <a:t>학교별 완독, 완독률, 어휘력 변화를 </a:t>
@@ -4868,7 +4868,7 @@
                   <a:srgbClr val="24302A"/>
                 </a:solidFill>
                 <a:latin typeface="Pretendard" pitchFamily="34" charset="0"/>
-                <a:ea typeface="Pretendard" pitchFamily="34" charset="-122"/>
+                <a:ea typeface="Pretendard" pitchFamily="34" charset="-127"/>
                 <a:cs typeface="Pretendard" pitchFamily="34" charset="-120"/>
               </a:rPr>
               <a:t>월간, 학기별,</a:t>
@@ -4888,7 +4888,7 @@
                   <a:srgbClr val="24302A"/>
                 </a:solidFill>
                 <a:latin typeface="Pretendard" pitchFamily="34" charset="0"/>
-                <a:ea typeface="Pretendard" pitchFamily="34" charset="-122"/>
+                <a:ea typeface="Pretendard" pitchFamily="34" charset="-127"/>
                 <a:cs typeface="Pretendard" pitchFamily="34" charset="-120"/>
               </a:rPr>
               <a:t>연간</a:t>
@@ -4905,7 +4905,7 @@
                   <a:srgbClr val="4C574F"/>
                 </a:solidFill>
                 <a:latin typeface="Pretendard" pitchFamily="34" charset="0"/>
-                <a:ea typeface="Pretendard" pitchFamily="34" charset="-122"/>
+                <a:ea typeface="Pretendard" pitchFamily="34" charset="-127"/>
                 <a:cs typeface="Pretendard" pitchFamily="34" charset="-120"/>
               </a:rPr>
               <a:t> 숫자로 보고합니다.</a:t>
@@ -4947,7 +4947,7 @@
                   <a:srgbClr val="4C574F"/>
                 </a:solidFill>
                 <a:latin typeface="Pretendard" pitchFamily="34" charset="0"/>
-                <a:ea typeface="Pretendard" pitchFamily="34" charset="-122"/>
+                <a:ea typeface="Pretendard" pitchFamily="34" charset="-127"/>
                 <a:cs typeface="Pretendard" pitchFamily="34" charset="-120"/>
               </a:rPr>
               <a:t>다 읽으면 인물이 된 부기가 묻고 까닭을 다시</a:t>
@@ -4967,7 +4967,7 @@
                   <a:srgbClr val="4C574F"/>
                 </a:solidFill>
                 <a:latin typeface="Pretendard" pitchFamily="34" charset="0"/>
-                <a:ea typeface="Pretendard" pitchFamily="34" charset="-122"/>
+                <a:ea typeface="Pretendard" pitchFamily="34" charset="-127"/>
                 <a:cs typeface="Pretendard" pitchFamily="34" charset="-120"/>
               </a:rPr>
               <a:t>묻습니다(</a:t>
@@ -4984,7 +4984,7 @@
                   <a:srgbClr val="24302A"/>
                 </a:solidFill>
                 <a:latin typeface="Pretendard" pitchFamily="34" charset="0"/>
-                <a:ea typeface="Pretendard" pitchFamily="34" charset="-122"/>
+                <a:ea typeface="Pretendard" pitchFamily="34" charset="-127"/>
                 <a:cs typeface="Pretendard" pitchFamily="34" charset="-120"/>
               </a:rPr>
               <a:t>캐릭터와 대화, 특허 등록</a:t>
@@ -5001,7 +5001,7 @@
                   <a:srgbClr val="4C574F"/>
                 </a:solidFill>
                 <a:latin typeface="Pretendard" pitchFamily="34" charset="0"/>
-                <a:ea typeface="Pretendard" pitchFamily="34" charset="-122"/>
+                <a:ea typeface="Pretendard" pitchFamily="34" charset="-127"/>
                 <a:cs typeface="Pretendard" pitchFamily="34" charset="-120"/>
               </a:rPr>
               <a:t>). 1~4학년</a:t>
@@ -5021,7 +5021,7 @@
                   <a:srgbClr val="4C574F"/>
                 </a:solidFill>
                 <a:latin typeface="Pretendard" pitchFamily="34" charset="0"/>
-                <a:ea typeface="Pretendard" pitchFamily="34" charset="-122"/>
+                <a:ea typeface="Pretendard" pitchFamily="34" charset="-127"/>
                 <a:cs typeface="Pretendard" pitchFamily="34" charset="-120"/>
               </a:rPr>
               <a:t>200권은 모국어와 한국어로 나란히 읽습니다.</a:t>
@@ -5063,7 +5063,7 @@
                   <a:srgbClr val="4C574F"/>
                 </a:solidFill>
                 <a:latin typeface="Pretendard" pitchFamily="34" charset="0"/>
-                <a:ea typeface="Pretendard" pitchFamily="34" charset="-122"/>
+                <a:ea typeface="Pretendard" pitchFamily="34" charset="-127"/>
                 <a:cs typeface="Pretendard" pitchFamily="34" charset="-120"/>
               </a:rPr>
               <a:t>교육부 「학교 독서교육 활성화 방안」의 책 읽는</a:t>
@@ -5083,7 +5083,7 @@
                   <a:srgbClr val="4C574F"/>
                 </a:solidFill>
                 <a:latin typeface="Pretendard" pitchFamily="34" charset="0"/>
-                <a:ea typeface="Pretendard" pitchFamily="34" charset="-122"/>
+                <a:ea typeface="Pretendard" pitchFamily="34" charset="-127"/>
                 <a:cs typeface="Pretendard" pitchFamily="34" charset="-120"/>
               </a:rPr>
               <a:t>학교 문화, 초3~4 독서교육 집중 학년, 독서 연계</a:t>
@@ -5103,7 +5103,7 @@
                   <a:srgbClr val="4C574F"/>
                 </a:solidFill>
                 <a:latin typeface="Pretendard" pitchFamily="34" charset="0"/>
-                <a:ea typeface="Pretendard" pitchFamily="34" charset="-122"/>
+                <a:ea typeface="Pretendard" pitchFamily="34" charset="-127"/>
                 <a:cs typeface="Pretendard" pitchFamily="34" charset="-120"/>
               </a:rPr>
               <a:t>교과 수업에 씁니다.</a:t>
@@ -5145,7 +5145,7 @@
                   <a:srgbClr val="24302A"/>
                 </a:solidFill>
                 <a:latin typeface="Pretendard" pitchFamily="34" charset="0"/>
-                <a:ea typeface="Pretendard" pitchFamily="34" charset="-122"/>
+                <a:ea typeface="Pretendard" pitchFamily="34" charset="-127"/>
                 <a:cs typeface="Pretendard" pitchFamily="34" charset="-120"/>
               </a:rPr>
               <a:t>활동 카드 9가지</a:t>
@@ -5162,7 +5162,7 @@
                   <a:srgbClr val="4C574F"/>
                 </a:solidFill>
                 <a:latin typeface="Pretendard" pitchFamily="34" charset="0"/>
-                <a:ea typeface="Pretendard" pitchFamily="34" charset="-122"/>
+                <a:ea typeface="Pretendard" pitchFamily="34" charset="-127"/>
                 <a:cs typeface="Pretendard" pitchFamily="34" charset="-120"/>
               </a:rPr>
               <a:t>을 골라 내주고, 어휘력 진단</a:t>
@@ -5182,7 +5182,7 @@
                   <a:srgbClr val="4C574F"/>
                 </a:solidFill>
                 <a:latin typeface="Pretendard" pitchFamily="34" charset="0"/>
-                <a:ea typeface="Pretendard" pitchFamily="34" charset="-122"/>
+                <a:ea typeface="Pretendard" pitchFamily="34" charset="-127"/>
                 <a:cs typeface="Pretendard" pitchFamily="34" charset="-120"/>
               </a:rPr>
               <a:t>결과로 학생마다 3개 수준의 책을 권합니다.</a:t>
@@ -5224,7 +5224,7 @@
                   <a:srgbClr val="FFFFFF"/>
                 </a:solidFill>
                 <a:latin typeface="Pretendard" pitchFamily="34" charset="0"/>
-                <a:ea typeface="Pretendard" pitchFamily="34" charset="-122"/>
+                <a:ea typeface="Pretendard" pitchFamily="34" charset="-127"/>
                 <a:cs typeface="Pretendard" pitchFamily="34" charset="-120"/>
               </a:rPr>
               <a:t>4</a:t>
@@ -5266,7 +5266,7 @@
                   <a:srgbClr val="7B847D"/>
                 </a:solidFill>
                 <a:latin typeface="Pretendard Medium" pitchFamily="34" charset="0"/>
-                <a:ea typeface="Pretendard Medium" pitchFamily="34" charset="-122"/>
+                <a:ea typeface="Pretendard Medium" pitchFamily="34" charset="-127"/>
                 <a:cs typeface="Pretendard Medium" pitchFamily="34" charset="-120"/>
               </a:rPr>
               <a:t>2026. 9. 20.~10. 21., 온오프라인 운영 종합</a:t>
@@ -5308,7 +5308,7 @@
                   <a:srgbClr val="1D3A2A"/>
                 </a:solidFill>
                 <a:latin typeface="Pretendard ExtraBold" pitchFamily="34" charset="0"/>
-                <a:ea typeface="Pretendard ExtraBold" pitchFamily="34" charset="-122"/>
+                <a:ea typeface="Pretendard ExtraBold" pitchFamily="34" charset="-127"/>
                 <a:cs typeface="Pretendard ExtraBold" pitchFamily="34" charset="-120"/>
               </a:rPr>
               <a:t>선도교사단 한 달 운영 결과</a:t>
@@ -5350,7 +5350,7 @@
                   <a:srgbClr val="1D3A2A"/>
                 </a:solidFill>
                 <a:latin typeface="Pretendard ExtraBold" pitchFamily="34" charset="0"/>
-                <a:ea typeface="Pretendard ExtraBold" pitchFamily="34" charset="-122"/>
+                <a:ea typeface="Pretendard ExtraBold" pitchFamily="34" charset="-127"/>
                 <a:cs typeface="Pretendard ExtraBold" pitchFamily="34" charset="-120"/>
               </a:rPr>
               <a:t>72</a:t>
@@ -5367,7 +5367,7 @@
                   <a:srgbClr val="1D3A2A"/>
                 </a:solidFill>
                 <a:latin typeface="Pretendard" pitchFamily="34" charset="0"/>
-                <a:ea typeface="Pretendard" pitchFamily="34" charset="-122"/>
+                <a:ea typeface="Pretendard" pitchFamily="34" charset="-127"/>
                 <a:cs typeface="Pretendard" pitchFamily="34" charset="-120"/>
               </a:rPr>
               <a:t>학급</a:t>
@@ -5409,7 +5409,7 @@
                   <a:srgbClr val="1D3A2A"/>
                 </a:solidFill>
                 <a:latin typeface="Pretendard ExtraBold" pitchFamily="34" charset="0"/>
-                <a:ea typeface="Pretendard ExtraBold" pitchFamily="34" charset="-122"/>
+                <a:ea typeface="Pretendard ExtraBold" pitchFamily="34" charset="-127"/>
                 <a:cs typeface="Pretendard ExtraBold" pitchFamily="34" charset="-120"/>
               </a:rPr>
               <a:t>1,196</a:t>
@@ -5426,7 +5426,7 @@
                   <a:srgbClr val="1D3A2A"/>
                 </a:solidFill>
                 <a:latin typeface="Pretendard" pitchFamily="34" charset="0"/>
-                <a:ea typeface="Pretendard" pitchFamily="34" charset="-122"/>
+                <a:ea typeface="Pretendard" pitchFamily="34" charset="-127"/>
                 <a:cs typeface="Pretendard" pitchFamily="34" charset="-120"/>
               </a:rPr>
               <a:t>명</a:t>
@@ -5468,7 +5468,7 @@
                   <a:srgbClr val="C08A1E"/>
                 </a:solidFill>
                 <a:latin typeface="Pretendard ExtraBold" pitchFamily="34" charset="0"/>
-                <a:ea typeface="Pretendard ExtraBold" pitchFamily="34" charset="-122"/>
+                <a:ea typeface="Pretendard ExtraBold" pitchFamily="34" charset="-127"/>
                 <a:cs typeface="Pretendard ExtraBold" pitchFamily="34" charset="-120"/>
               </a:rPr>
               <a:t>26,924</a:t>
@@ -5485,7 +5485,7 @@
                   <a:srgbClr val="C08A1E"/>
                 </a:solidFill>
                 <a:latin typeface="Pretendard" pitchFamily="34" charset="0"/>
-                <a:ea typeface="Pretendard" pitchFamily="34" charset="-122"/>
+                <a:ea typeface="Pretendard" pitchFamily="34" charset="-127"/>
                 <a:cs typeface="Pretendard" pitchFamily="34" charset="-120"/>
               </a:rPr>
               <a:t>권</a:t>
@@ -5527,7 +5527,7 @@
                   <a:srgbClr val="1D3A2A"/>
                 </a:solidFill>
                 <a:latin typeface="Pretendard ExtraBold" pitchFamily="34" charset="0"/>
-                <a:ea typeface="Pretendard ExtraBold" pitchFamily="34" charset="-122"/>
+                <a:ea typeface="Pretendard ExtraBold" pitchFamily="34" charset="-127"/>
                 <a:cs typeface="Pretendard ExtraBold" pitchFamily="34" charset="-120"/>
               </a:rPr>
               <a:t>1,816</a:t>
@@ -5544,7 +5544,7 @@
                   <a:srgbClr val="1D3A2A"/>
                 </a:solidFill>
                 <a:latin typeface="Pretendard" pitchFamily="34" charset="0"/>
-                <a:ea typeface="Pretendard" pitchFamily="34" charset="-122"/>
+                <a:ea typeface="Pretendard" pitchFamily="34" charset="-127"/>
                 <a:cs typeface="Pretendard" pitchFamily="34" charset="-120"/>
               </a:rPr>
               <a:t>건</a:t>
@@ -5586,7 +5586,7 @@
                   <a:srgbClr val="4C574F"/>
                 </a:solidFill>
                 <a:latin typeface="Pretendard" pitchFamily="34" charset="0"/>
-                <a:ea typeface="Pretendard" pitchFamily="34" charset="-122"/>
+                <a:ea typeface="Pretendard" pitchFamily="34" charset="-127"/>
                 <a:cs typeface="Pretendard" pitchFamily="34" charset="-120"/>
               </a:rPr>
               <a:t>온오프라인</a:t>
@@ -5606,7 +5606,7 @@
                   <a:srgbClr val="4C574F"/>
                 </a:solidFill>
                 <a:latin typeface="Pretendard" pitchFamily="34" charset="0"/>
-                <a:ea typeface="Pretendard" pitchFamily="34" charset="-122"/>
+                <a:ea typeface="Pretendard" pitchFamily="34" charset="-127"/>
                 <a:cs typeface="Pretendard" pitchFamily="34" charset="-120"/>
               </a:rPr>
               <a:t>운영</a:t>
@@ -5648,7 +5648,7 @@
                   <a:srgbClr val="4C574F"/>
                 </a:solidFill>
                 <a:latin typeface="Pretendard" pitchFamily="34" charset="0"/>
-                <a:ea typeface="Pretendard" pitchFamily="34" charset="-122"/>
+                <a:ea typeface="Pretendard" pitchFamily="34" charset="-127"/>
                 <a:cs typeface="Pretendard" pitchFamily="34" charset="-120"/>
               </a:rPr>
               <a:t>한 달 동안</a:t>
@@ -5668,7 +5668,7 @@
                   <a:srgbClr val="4C574F"/>
                 </a:solidFill>
                 <a:latin typeface="Pretendard" pitchFamily="34" charset="0"/>
-                <a:ea typeface="Pretendard" pitchFamily="34" charset="-122"/>
+                <a:ea typeface="Pretendard" pitchFamily="34" charset="-127"/>
                 <a:cs typeface="Pretendard" pitchFamily="34" charset="-120"/>
               </a:rPr>
               <a:t>실제로 쓴 학생</a:t>
@@ -5710,7 +5710,7 @@
                   <a:srgbClr val="4C574F"/>
                 </a:solidFill>
                 <a:latin typeface="Pretendard" pitchFamily="34" charset="0"/>
-                <a:ea typeface="Pretendard" pitchFamily="34" charset="-122"/>
+                <a:ea typeface="Pretendard" pitchFamily="34" charset="-127"/>
                 <a:cs typeface="Pretendard" pitchFamily="34" charset="-120"/>
               </a:rPr>
               <a:t>완독 기록</a:t>
@@ -5730,7 +5730,7 @@
                   <a:srgbClr val="4C574F"/>
                 </a:solidFill>
                 <a:latin typeface="Pretendard" pitchFamily="34" charset="0"/>
-                <a:ea typeface="Pretendard" pitchFamily="34" charset="-122"/>
+                <a:ea typeface="Pretendard" pitchFamily="34" charset="-127"/>
                 <a:cs typeface="Pretendard" pitchFamily="34" charset="-120"/>
               </a:rPr>
               <a:t>1인당 22.5권</a:t>
@@ -5772,7 +5772,7 @@
                   <a:srgbClr val="4C574F"/>
                 </a:solidFill>
                 <a:latin typeface="Pretendard" pitchFamily="34" charset="0"/>
-                <a:ea typeface="Pretendard" pitchFamily="34" charset="-122"/>
+                <a:ea typeface="Pretendard" pitchFamily="34" charset="-127"/>
                 <a:cs typeface="Pretendard" pitchFamily="34" charset="-120"/>
               </a:rPr>
               <a:t>학생</a:t>
@@ -5792,7 +5792,7 @@
                   <a:srgbClr val="4C574F"/>
                 </a:solidFill>
                 <a:latin typeface="Pretendard" pitchFamily="34" charset="0"/>
-                <a:ea typeface="Pretendard" pitchFamily="34" charset="-122"/>
+                <a:ea typeface="Pretendard" pitchFamily="34" charset="-127"/>
                 <a:cs typeface="Pretendard" pitchFamily="34" charset="-120"/>
               </a:rPr>
               <a:t>독후활동</a:t>
@@ -5834,7 +5834,7 @@
                   <a:srgbClr val="24302A"/>
                 </a:solidFill>
                 <a:latin typeface="Pretendard" pitchFamily="34" charset="0"/>
-                <a:ea typeface="Pretendard" pitchFamily="34" charset="-122"/>
+                <a:ea typeface="Pretendard" pitchFamily="34" charset="-127"/>
                 <a:cs typeface="Pretendard" pitchFamily="34" charset="-120"/>
               </a:rPr>
               <a:t>“…부기를 활용하니 책을 더 많이 읽게 된 것 같아요. 또 캐릭터 꾸미기를 아이들이 너무 좋아하여 쉬는 시간에도 계속 읽고</a:t>
@@ -5854,7 +5854,7 @@
                   <a:srgbClr val="24302A"/>
                 </a:solidFill>
                 <a:latin typeface="Pretendard" pitchFamily="34" charset="0"/>
-                <a:ea typeface="Pretendard" pitchFamily="34" charset="-122"/>
+                <a:ea typeface="Pretendard" pitchFamily="34" charset="-127"/>
                 <a:cs typeface="Pretendard" pitchFamily="34" charset="-120"/>
               </a:rPr>
               <a:t>있네요.”</a:t>
@@ -5871,7 +5871,7 @@
                   <a:srgbClr val="7B847D"/>
                 </a:solidFill>
                 <a:latin typeface="Pretendard" pitchFamily="34" charset="0"/>
-                <a:ea typeface="Pretendard" pitchFamily="34" charset="-122"/>
+                <a:ea typeface="Pretendard" pitchFamily="34" charset="-127"/>
                 <a:cs typeface="Pretendard" pitchFamily="34" charset="-120"/>
               </a:rPr>
               <a:t>  석산초 4학년 김○○ 교사</a:t>
@@ -5913,7 +5913,7 @@
                   <a:srgbClr val="FFFFFF"/>
                 </a:solidFill>
                 <a:latin typeface="Pretendard" pitchFamily="34" charset="0"/>
-                <a:ea typeface="Pretendard" pitchFamily="34" charset="-122"/>
+                <a:ea typeface="Pretendard" pitchFamily="34" charset="-127"/>
                 <a:cs typeface="Pretendard" pitchFamily="34" charset="-120"/>
               </a:rPr>
               <a:t>석산초 6학년 부기 수업(얼굴 가림)</a:t>
@@ -5955,7 +5955,7 @@
                   <a:srgbClr val="4C574F"/>
                 </a:solidFill>
                 <a:latin typeface="Pretendard" pitchFamily="34" charset="0"/>
-                <a:ea typeface="Pretendard" pitchFamily="34" charset="-122"/>
+                <a:ea typeface="Pretendard" pitchFamily="34" charset="-127"/>
                 <a:cs typeface="Pretendard" pitchFamily="34" charset="-120"/>
               </a:rPr>
               <a:t>경상남도 내 초등학교 30곳의 선도교사단과 수업을 운영하며 현장 의견을 반영합니다.</a:t>
@@ -5997,7 +5997,7 @@
                   <a:srgbClr val="FFFFFF"/>
                 </a:solidFill>
                 <a:latin typeface="Pretendard" pitchFamily="34" charset="0"/>
-                <a:ea typeface="Pretendard" pitchFamily="34" charset="-122"/>
+                <a:ea typeface="Pretendard" pitchFamily="34" charset="-127"/>
                 <a:cs typeface="Pretendard" pitchFamily="34" charset="-120"/>
               </a:rPr>
               <a:t>5</a:t>
@@ -6039,7 +6039,7 @@
                   <a:srgbClr val="7B847D"/>
                 </a:solidFill>
                 <a:latin typeface="Pretendard Medium" pitchFamily="34" charset="0"/>
-                <a:ea typeface="Pretendard Medium" pitchFamily="34" charset="-122"/>
+                <a:ea typeface="Pretendard Medium" pitchFamily="34" charset="-127"/>
                 <a:cs typeface="Pretendard Medium" pitchFamily="34" charset="-120"/>
               </a:rPr>
               <a:t>개발 기간 없이 계약 직후 시작, 전담 조직 9명(총괄 PM 1, 수업과 콘텐츠 2, 기술 운영 2, 현장 지원 3, 헬프데스크 1)</a:t>
@@ -6081,7 +6081,7 @@
                   <a:srgbClr val="1D3A2A"/>
                 </a:solidFill>
                 <a:latin typeface="Pretendard ExtraBold" pitchFamily="34" charset="0"/>
-                <a:ea typeface="Pretendard ExtraBold" pitchFamily="34" charset="-122"/>
+                <a:ea typeface="Pretendard ExtraBold" pitchFamily="34" charset="-127"/>
                 <a:cs typeface="Pretendard ExtraBold" pitchFamily="34" charset="-120"/>
               </a:rPr>
               <a:t>추진 일정과 운영지원</a:t>
@@ -6123,7 +6123,7 @@
                   <a:srgbClr val="1D3A2A"/>
                 </a:solidFill>
                 <a:latin typeface="Pretendard ExtraBold" pitchFamily="34" charset="0"/>
-                <a:ea typeface="Pretendard ExtraBold" pitchFamily="34" charset="-122"/>
+                <a:ea typeface="Pretendard ExtraBold" pitchFamily="34" charset="-127"/>
                 <a:cs typeface="Pretendard ExtraBold" pitchFamily="34" charset="-120"/>
               </a:rPr>
               <a:t>1 착수와 준비</a:t>
@@ -6165,7 +6165,7 @@
                   <a:srgbClr val="1D3A2A"/>
                 </a:solidFill>
                 <a:latin typeface="Pretendard ExtraBold" pitchFamily="34" charset="0"/>
-                <a:ea typeface="Pretendard ExtraBold" pitchFamily="34" charset="-122"/>
+                <a:ea typeface="Pretendard ExtraBold" pitchFamily="34" charset="-127"/>
                 <a:cs typeface="Pretendard ExtraBold" pitchFamily="34" charset="-120"/>
               </a:rPr>
               <a:t>2 배포와 연수</a:t>
@@ -6207,7 +6207,7 @@
                   <a:srgbClr val="1D3A2A"/>
                 </a:solidFill>
                 <a:latin typeface="Pretendard ExtraBold" pitchFamily="34" charset="0"/>
-                <a:ea typeface="Pretendard ExtraBold" pitchFamily="34" charset="-122"/>
+                <a:ea typeface="Pretendard ExtraBold" pitchFamily="34" charset="-127"/>
                 <a:cs typeface="Pretendard ExtraBold" pitchFamily="34" charset="-120"/>
               </a:rPr>
               <a:t>3 운영과 지원</a:t>
@@ -6249,7 +6249,7 @@
                   <a:srgbClr val="1D3A2A"/>
                 </a:solidFill>
                 <a:latin typeface="Pretendard ExtraBold" pitchFamily="34" charset="0"/>
-                <a:ea typeface="Pretendard ExtraBold" pitchFamily="34" charset="-122"/>
+                <a:ea typeface="Pretendard ExtraBold" pitchFamily="34" charset="-127"/>
                 <a:cs typeface="Pretendard ExtraBold" pitchFamily="34" charset="-120"/>
               </a:rPr>
               <a:t>4 성과와 환류</a:t>
@@ -6291,7 +6291,7 @@
                   <a:srgbClr val="C08A1E"/>
                 </a:solidFill>
                 <a:latin typeface="Pretendard SemiBold" pitchFamily="34" charset="0"/>
-                <a:ea typeface="Pretendard SemiBold" pitchFamily="34" charset="-122"/>
+                <a:ea typeface="Pretendard SemiBold" pitchFamily="34" charset="-127"/>
                 <a:cs typeface="Pretendard SemiBold" pitchFamily="34" charset="-120"/>
               </a:rPr>
               <a:t>계약~D+30</a:t>
@@ -6311,7 +6311,7 @@
                   <a:srgbClr val="4C574F"/>
                 </a:solidFill>
                 <a:latin typeface="Pretendard" pitchFamily="34" charset="0"/>
-                <a:ea typeface="Pretendard" pitchFamily="34" charset="-122"/>
+                <a:ea typeface="Pretendard" pitchFamily="34" charset="-127"/>
                 <a:cs typeface="Pretendard" pitchFamily="34" charset="-120"/>
               </a:rPr>
               <a:t>참여 학교 선정, 학급코드 발급 설계,</a:t>
@@ -6353,7 +6353,7 @@
                   <a:srgbClr val="C08A1E"/>
                 </a:solidFill>
                 <a:latin typeface="Pretendard SemiBold" pitchFamily="34" charset="0"/>
-                <a:ea typeface="Pretendard SemiBold" pitchFamily="34" charset="-122"/>
+                <a:ea typeface="Pretendard SemiBold" pitchFamily="34" charset="-127"/>
                 <a:cs typeface="Pretendard SemiBold" pitchFamily="34" charset="-120"/>
               </a:rPr>
               <a:t>D+31~D+75</a:t>
@@ -6373,7 +6373,7 @@
                   <a:srgbClr val="4C574F"/>
                 </a:solidFill>
                 <a:latin typeface="Pretendard" pitchFamily="34" charset="0"/>
-                <a:ea typeface="Pretendard" pitchFamily="34" charset="-122"/>
+                <a:ea typeface="Pretendard" pitchFamily="34" charset="-127"/>
                 <a:cs typeface="Pretendard" pitchFamily="34" charset="-120"/>
               </a:rPr>
               <a:t>찾아가는 교원 연수 15시간, 학교별</a:t>
@@ -6415,7 +6415,7 @@
                   <a:srgbClr val="C08A1E"/>
                 </a:solidFill>
                 <a:latin typeface="Pretendard SemiBold" pitchFamily="34" charset="0"/>
-                <a:ea typeface="Pretendard SemiBold" pitchFamily="34" charset="-122"/>
+                <a:ea typeface="Pretendard SemiBold" pitchFamily="34" charset="-127"/>
                 <a:cs typeface="Pretendard SemiBold" pitchFamily="34" charset="-120"/>
               </a:rPr>
               <a:t>D+76~종료 1개월 전</a:t>
@@ -6435,7 +6435,7 @@
                   <a:srgbClr val="4C574F"/>
                 </a:solidFill>
                 <a:latin typeface="Pretendard" pitchFamily="34" charset="0"/>
-                <a:ea typeface="Pretendard" pitchFamily="34" charset="-122"/>
+                <a:ea typeface="Pretendard" pitchFamily="34" charset="-127"/>
                 <a:cs typeface="Pretendard" pitchFamily="34" charset="-120"/>
               </a:rPr>
               <a:t>월간 이용 현황 점검, 미활용 학급 선제</a:t>
@@ -6477,7 +6477,7 @@
                   <a:srgbClr val="C08A1E"/>
                 </a:solidFill>
                 <a:latin typeface="Pretendard SemiBold" pitchFamily="34" charset="0"/>
-                <a:ea typeface="Pretendard SemiBold" pitchFamily="34" charset="-122"/>
+                <a:ea typeface="Pretendard SemiBold" pitchFamily="34" charset="-127"/>
                 <a:cs typeface="Pretendard SemiBold" pitchFamily="34" charset="-120"/>
               </a:rPr>
               <a:t>종료 1개월 전~종료</a:t>
@@ -6497,7 +6497,7 @@
                   <a:srgbClr val="4C574F"/>
                 </a:solidFill>
                 <a:latin typeface="Pretendard" pitchFamily="34" charset="0"/>
-                <a:ea typeface="Pretendard" pitchFamily="34" charset="-122"/>
+                <a:ea typeface="Pretendard" pitchFamily="34" charset="-127"/>
                 <a:cs typeface="Pretendard" pitchFamily="34" charset="-120"/>
               </a:rPr>
               <a:t>성장 분석 보고, 학생과 교사 만족도</a:t>
@@ -6539,7 +6539,7 @@
                   <a:srgbClr val="4C574F"/>
                 </a:solidFill>
                 <a:latin typeface="Pretendard" pitchFamily="34" charset="0"/>
-                <a:ea typeface="Pretendard" pitchFamily="34" charset="-122"/>
+                <a:ea typeface="Pretendard" pitchFamily="34" charset="-127"/>
                 <a:cs typeface="Pretendard" pitchFamily="34" charset="-120"/>
               </a:rPr>
               <a:t>개인정보 보호 협의</a:t>
@@ -6581,7 +6581,7 @@
                   <a:srgbClr val="4C574F"/>
                 </a:solidFill>
                 <a:latin typeface="Pretendard" pitchFamily="34" charset="0"/>
-                <a:ea typeface="Pretendard" pitchFamily="34" charset="-122"/>
+                <a:ea typeface="Pretendard" pitchFamily="34" charset="-127"/>
                 <a:cs typeface="Pretendard" pitchFamily="34" charset="-120"/>
               </a:rPr>
               <a:t>온보딩, 헬프데스크 개설</a:t>
@@ -6623,7 +6623,7 @@
                   <a:srgbClr val="4C574F"/>
                 </a:solidFill>
                 <a:latin typeface="Pretendard" pitchFamily="34" charset="0"/>
-                <a:ea typeface="Pretendard" pitchFamily="34" charset="-122"/>
+                <a:ea typeface="Pretendard" pitchFamily="34" charset="-127"/>
                 <a:cs typeface="Pretendard" pitchFamily="34" charset="-120"/>
               </a:rPr>
               <a:t>지원, 우수 사례 발굴</a:t>
@@ -6665,7 +6665,7 @@
                   <a:srgbClr val="4C574F"/>
                 </a:solidFill>
                 <a:latin typeface="Pretendard" pitchFamily="34" charset="0"/>
-                <a:ea typeface="Pretendard" pitchFamily="34" charset="-122"/>
+                <a:ea typeface="Pretendard" pitchFamily="34" charset="-127"/>
                 <a:cs typeface="Pretendard" pitchFamily="34" charset="-120"/>
               </a:rPr>
               <a:t>조사, 결과 보고</a:t>
@@ -6707,7 +6707,7 @@
                   <a:srgbClr val="FFFFFF"/>
                 </a:solidFill>
                 <a:latin typeface="Pretendard" pitchFamily="34" charset="0"/>
-                <a:ea typeface="Pretendard" pitchFamily="34" charset="-122"/>
+                <a:ea typeface="Pretendard" pitchFamily="34" charset="-127"/>
                 <a:cs typeface="Pretendard" pitchFamily="34" charset="-120"/>
               </a:rPr>
               <a:t>6</a:t>
@@ -6749,7 +6749,7 @@
                   <a:srgbClr val="FFFFFF"/>
                 </a:solidFill>
                 <a:latin typeface="Pretendard" pitchFamily="34" charset="0"/>
-                <a:ea typeface="Pretendard" pitchFamily="34" charset="-122"/>
+                <a:ea typeface="Pretendard" pitchFamily="34" charset="-127"/>
                 <a:cs typeface="Pretendard" pitchFamily="34" charset="-120"/>
               </a:rPr>
               <a:t>7</a:t>
@@ -6791,7 +6791,7 @@
                   <a:srgbClr val="FFFFFF"/>
                 </a:solidFill>
                 <a:latin typeface="Pretendard" pitchFamily="34" charset="0"/>
-                <a:ea typeface="Pretendard" pitchFamily="34" charset="-122"/>
+                <a:ea typeface="Pretendard" pitchFamily="34" charset="-127"/>
                 <a:cs typeface="Pretendard" pitchFamily="34" charset="-120"/>
               </a:rPr>
               <a:t>8</a:t>
@@ -6833,7 +6833,7 @@
                   <a:srgbClr val="1D3A2A"/>
                 </a:solidFill>
                 <a:latin typeface="Pretendard ExtraBold" pitchFamily="34" charset="0"/>
-                <a:ea typeface="Pretendard ExtraBold" pitchFamily="34" charset="-122"/>
+                <a:ea typeface="Pretendard ExtraBold" pitchFamily="34" charset="-127"/>
                 <a:cs typeface="Pretendard ExtraBold" pitchFamily="34" charset="-120"/>
               </a:rPr>
               <a:t>1년차 성과 목표(안)</a:t>
@@ -6875,7 +6875,7 @@
                   <a:srgbClr val="1D3A2A"/>
                 </a:solidFill>
                 <a:latin typeface="Pretendard ExtraBold" pitchFamily="34" charset="0"/>
-                <a:ea typeface="Pretendard ExtraBold" pitchFamily="34" charset="-122"/>
+                <a:ea typeface="Pretendard ExtraBold" pitchFamily="34" charset="-127"/>
                 <a:cs typeface="Pretendard ExtraBold" pitchFamily="34" charset="-120"/>
               </a:rPr>
               <a:t>연간 사업비(안)</a:t>
@@ -6892,7 +6892,7 @@
                   <a:srgbClr val="7B847D"/>
                 </a:solidFill>
                 <a:latin typeface="Pretendard Medium" pitchFamily="34" charset="0"/>
-                <a:ea typeface="Pretendard Medium" pitchFamily="34" charset="-122"/>
+                <a:ea typeface="Pretendard Medium" pitchFamily="34" charset="-127"/>
                 <a:cs typeface="Pretendard Medium" pitchFamily="34" charset="-120"/>
               </a:rPr>
               <a:t>   학교당</a:t>
@@ -6934,7 +6934,7 @@
                   <a:srgbClr val="1D3A2A"/>
                 </a:solidFill>
                 <a:latin typeface="Pretendard ExtraBold" pitchFamily="34" charset="0"/>
-                <a:ea typeface="Pretendard ExtraBold" pitchFamily="34" charset="-122"/>
+                <a:ea typeface="Pretendard ExtraBold" pitchFamily="34" charset="-127"/>
                 <a:cs typeface="Pretendard ExtraBold" pitchFamily="34" charset="-120"/>
               </a:rPr>
               <a:t>수행 기관 MSECM</a:t>
@@ -6976,7 +6976,7 @@
                   <a:srgbClr val="2E7A4E"/>
                 </a:solidFill>
                 <a:latin typeface="Pretendard ExtraBold" pitchFamily="34" charset="0"/>
-                <a:ea typeface="Pretendard ExtraBold" pitchFamily="34" charset="-122"/>
+                <a:ea typeface="Pretendard ExtraBold" pitchFamily="34" charset="-127"/>
                 <a:cs typeface="Pretendard ExtraBold" pitchFamily="34" charset="-120"/>
               </a:rPr>
               <a:t>20% 증가</a:t>
@@ -7018,7 +7018,7 @@
                   <a:srgbClr val="2E7A4E"/>
                 </a:solidFill>
                 <a:latin typeface="Pretendard ExtraBold" pitchFamily="34" charset="0"/>
-                <a:ea typeface="Pretendard ExtraBold" pitchFamily="34" charset="-122"/>
+                <a:ea typeface="Pretendard ExtraBold" pitchFamily="34" charset="-127"/>
                 <a:cs typeface="Pretendard ExtraBold" pitchFamily="34" charset="-120"/>
               </a:rPr>
               <a:t>5%p 상승</a:t>
@@ -7060,7 +7060,7 @@
                   <a:srgbClr val="2E7A4E"/>
                 </a:solidFill>
                 <a:latin typeface="Pretendard ExtraBold" pitchFamily="34" charset="0"/>
-                <a:ea typeface="Pretendard ExtraBold" pitchFamily="34" charset="-122"/>
+                <a:ea typeface="Pretendard ExtraBold" pitchFamily="34" charset="-127"/>
                 <a:cs typeface="Pretendard ExtraBold" pitchFamily="34" charset="-120"/>
               </a:rPr>
               <a:t>20% 감소</a:t>
@@ -7102,7 +7102,7 @@
                   <a:srgbClr val="1D3A2A"/>
                 </a:solidFill>
                 <a:latin typeface="Pretendard ExtraBold" pitchFamily="34" charset="0"/>
-                <a:ea typeface="Pretendard ExtraBold" pitchFamily="34" charset="-122"/>
+                <a:ea typeface="Pretendard ExtraBold" pitchFamily="34" charset="-127"/>
                 <a:cs typeface="Pretendard ExtraBold" pitchFamily="34" charset="-120"/>
               </a:rPr>
               <a:t>185</a:t>
@@ -7119,7 +7119,7 @@
                   <a:srgbClr val="1D3A2A"/>
                 </a:solidFill>
                 <a:latin typeface="Pretendard" pitchFamily="34" charset="0"/>
-                <a:ea typeface="Pretendard" pitchFamily="34" charset="-122"/>
+                <a:ea typeface="Pretendard" pitchFamily="34" charset="-127"/>
                 <a:cs typeface="Pretendard" pitchFamily="34" charset="-120"/>
               </a:rPr>
               <a:t>건</a:t>
@@ -7161,7 +7161,7 @@
                   <a:srgbClr val="1D3A2A"/>
                 </a:solidFill>
                 <a:latin typeface="Pretendard ExtraBold" pitchFamily="34" charset="0"/>
-                <a:ea typeface="Pretendard ExtraBold" pitchFamily="34" charset="-122"/>
+                <a:ea typeface="Pretendard ExtraBold" pitchFamily="34" charset="-127"/>
                 <a:cs typeface="Pretendard ExtraBold" pitchFamily="34" charset="-120"/>
               </a:rPr>
               <a:t>93.0</a:t>
@@ -7178,7 +7178,7 @@
                   <a:srgbClr val="1D3A2A"/>
                 </a:solidFill>
                 <a:latin typeface="Pretendard" pitchFamily="34" charset="0"/>
-                <a:ea typeface="Pretendard" pitchFamily="34" charset="-122"/>
+                <a:ea typeface="Pretendard" pitchFamily="34" charset="-127"/>
                 <a:cs typeface="Pretendard" pitchFamily="34" charset="-120"/>
               </a:rPr>
               <a:t>억 원</a:t>
@@ -7220,7 +7220,7 @@
                   <a:srgbClr val="1D3A2A"/>
                 </a:solidFill>
                 <a:latin typeface="Pretendard ExtraBold" pitchFamily="34" charset="0"/>
-                <a:ea typeface="Pretendard ExtraBold" pitchFamily="34" charset="-122"/>
+                <a:ea typeface="Pretendard ExtraBold" pitchFamily="34" charset="-127"/>
                 <a:cs typeface="Pretendard ExtraBold" pitchFamily="34" charset="-120"/>
               </a:rPr>
               <a:t>500</a:t>
@@ -7237,7 +7237,7 @@
                   <a:srgbClr val="1D3A2A"/>
                 </a:solidFill>
                 <a:latin typeface="Pretendard" pitchFamily="34" charset="0"/>
-                <a:ea typeface="Pretendard" pitchFamily="34" charset="-122"/>
+                <a:ea typeface="Pretendard" pitchFamily="34" charset="-127"/>
                 <a:cs typeface="Pretendard" pitchFamily="34" charset="-120"/>
               </a:rPr>
               <a:t>만 원</a:t>
@@ -7279,7 +7279,7 @@
                   <a:srgbClr val="F2D58A"/>
                 </a:solidFill>
                 <a:latin typeface="Pretendard ExtraBold" pitchFamily="34" charset="0"/>
-                <a:ea typeface="Pretendard ExtraBold" pitchFamily="34" charset="-122"/>
+                <a:ea typeface="Pretendard ExtraBold" pitchFamily="34" charset="-127"/>
                 <a:cs typeface="Pretendard ExtraBold" pitchFamily="34" charset="-120"/>
               </a:rPr>
               <a:t>1,000</a:t>
@@ -7296,7 +7296,7 @@
                   <a:srgbClr val="F2D58A"/>
                 </a:solidFill>
                 <a:latin typeface="Pretendard" pitchFamily="34" charset="0"/>
-                <a:ea typeface="Pretendard" pitchFamily="34" charset="-122"/>
+                <a:ea typeface="Pretendard" pitchFamily="34" charset="-127"/>
                 <a:cs typeface="Pretendard" pitchFamily="34" charset="-120"/>
               </a:rPr>
               <a:t>만 원</a:t>
@@ -7338,7 +7338,7 @@
                   <a:srgbClr val="4C574F"/>
                 </a:solidFill>
                 <a:latin typeface="Pretendard" pitchFamily="34" charset="0"/>
-                <a:ea typeface="Pretendard" pitchFamily="34" charset="-122"/>
+                <a:ea typeface="Pretendard" pitchFamily="34" charset="-127"/>
                 <a:cs typeface="Pretendard" pitchFamily="34" charset="-120"/>
               </a:rPr>
               <a:t>1인 월평균</a:t>
@@ -7358,7 +7358,7 @@
                   <a:srgbClr val="4C574F"/>
                 </a:solidFill>
                 <a:latin typeface="Pretendard" pitchFamily="34" charset="0"/>
-                <a:ea typeface="Pretendard" pitchFamily="34" charset="-122"/>
+                <a:ea typeface="Pretendard" pitchFamily="34" charset="-127"/>
                 <a:cs typeface="Pretendard" pitchFamily="34" charset="-120"/>
               </a:rPr>
               <a:t>완독 권수</a:t>
@@ -7400,7 +7400,7 @@
                   <a:srgbClr val="4C574F"/>
                 </a:solidFill>
                 <a:latin typeface="Pretendard" pitchFamily="34" charset="0"/>
-                <a:ea typeface="Pretendard" pitchFamily="34" charset="-122"/>
+                <a:ea typeface="Pretendard" pitchFamily="34" charset="-127"/>
                 <a:cs typeface="Pretendard" pitchFamily="34" charset="-120"/>
               </a:rPr>
               <a:t>어휘력 진단</a:t>
@@ -7420,7 +7420,7 @@
                   <a:srgbClr val="4C574F"/>
                 </a:solidFill>
                 <a:latin typeface="Pretendard" pitchFamily="34" charset="0"/>
-                <a:ea typeface="Pretendard" pitchFamily="34" charset="-122"/>
+                <a:ea typeface="Pretendard" pitchFamily="34" charset="-127"/>
                 <a:cs typeface="Pretendard" pitchFamily="34" charset="-120"/>
               </a:rPr>
               <a:t>평균 정답률</a:t>
@@ -7462,7 +7462,7 @@
                   <a:srgbClr val="4C574F"/>
                 </a:solidFill>
                 <a:latin typeface="Pretendard" pitchFamily="34" charset="0"/>
-                <a:ea typeface="Pretendard" pitchFamily="34" charset="-122"/>
+                <a:ea typeface="Pretendard" pitchFamily="34" charset="-127"/>
                 <a:cs typeface="Pretendard" pitchFamily="34" charset="-120"/>
               </a:rPr>
               <a:t>「천천히 다지기」</a:t>
@@ -7482,7 +7482,7 @@
                   <a:srgbClr val="4C574F"/>
                 </a:solidFill>
                 <a:latin typeface="Pretendard" pitchFamily="34" charset="0"/>
-                <a:ea typeface="Pretendard" pitchFamily="34" charset="-122"/>
+                <a:ea typeface="Pretendard" pitchFamily="34" charset="-127"/>
                 <a:cs typeface="Pretendard" pitchFamily="34" charset="-120"/>
               </a:rPr>
               <a:t>학생 비율</a:t>
@@ -7524,7 +7524,7 @@
                   <a:srgbClr val="4C574F"/>
                 </a:solidFill>
                 <a:latin typeface="Pretendard" pitchFamily="34" charset="0"/>
-                <a:ea typeface="Pretendard" pitchFamily="34" charset="-122"/>
+                <a:ea typeface="Pretendard" pitchFamily="34" charset="-127"/>
                 <a:cs typeface="Pretendard" pitchFamily="34" charset="-120"/>
               </a:rPr>
               <a:t>공공 독서교육 계약</a:t>
@@ -7566,7 +7566,7 @@
                   <a:srgbClr val="4C574F"/>
                 </a:solidFill>
                 <a:latin typeface="Pretendard" pitchFamily="34" charset="0"/>
-                <a:ea typeface="Pretendard" pitchFamily="34" charset="-122"/>
+                <a:ea typeface="Pretendard" pitchFamily="34" charset="-127"/>
                 <a:cs typeface="Pretendard" pitchFamily="34" charset="-120"/>
               </a:rPr>
               <a:t>누적 계약 금액</a:t>
@@ -7608,7 +7608,7 @@
                   <a:srgbClr val="4C574F"/>
                 </a:solidFill>
                 <a:latin typeface="Pretendard" pitchFamily="34" charset="0"/>
-                <a:ea typeface="Pretendard" pitchFamily="34" charset="-122"/>
+                <a:ea typeface="Pretendard" pitchFamily="34" charset="-127"/>
                 <a:cs typeface="Pretendard" pitchFamily="34" charset="-120"/>
               </a:rPr>
               <a:t>소규모, 6학급 이하</a:t>
@@ -7650,7 +7650,7 @@
                   <a:srgbClr val="FFFFFF"/>
                 </a:solidFill>
                 <a:latin typeface="Pretendard" pitchFamily="34" charset="0"/>
-                <a:ea typeface="Pretendard" pitchFamily="34" charset="-122"/>
+                <a:ea typeface="Pretendard" pitchFamily="34" charset="-127"/>
                 <a:cs typeface="Pretendard" pitchFamily="34" charset="-120"/>
               </a:rPr>
               <a:t>표준, 7~18학급</a:t>
@@ -7692,7 +7692,7 @@
                   <a:srgbClr val="1D3A2A"/>
                 </a:solidFill>
                 <a:latin typeface="Pretendard ExtraBold" pitchFamily="34" charset="0"/>
-                <a:ea typeface="Pretendard ExtraBold" pitchFamily="34" charset="-122"/>
+                <a:ea typeface="Pretendard ExtraBold" pitchFamily="34" charset="-127"/>
                 <a:cs typeface="Pretendard ExtraBold" pitchFamily="34" charset="-120"/>
               </a:rPr>
               <a:t>71</a:t>
@@ -7709,7 +7709,7 @@
                   <a:srgbClr val="1D3A2A"/>
                 </a:solidFill>
                 <a:latin typeface="Pretendard" pitchFamily="34" charset="0"/>
-                <a:ea typeface="Pretendard" pitchFamily="34" charset="-122"/>
+                <a:ea typeface="Pretendard" pitchFamily="34" charset="-127"/>
                 <a:cs typeface="Pretendard" pitchFamily="34" charset="-120"/>
               </a:rPr>
               <a:t>%</a:t>
@@ -7751,7 +7751,7 @@
                   <a:srgbClr val="2E7A4E"/>
                 </a:solidFill>
                 <a:latin typeface="Pretendard ExtraBold" pitchFamily="34" charset="0"/>
-                <a:ea typeface="Pretendard ExtraBold" pitchFamily="34" charset="-122"/>
+                <a:ea typeface="Pretendard ExtraBold" pitchFamily="34" charset="-127"/>
                 <a:cs typeface="Pretendard ExtraBold" pitchFamily="34" charset="-120"/>
               </a:rPr>
               <a:t>특허 등록</a:t>
@@ -7793,7 +7793,7 @@
                   <a:srgbClr val="1D3A2A"/>
                 </a:solidFill>
                 <a:latin typeface="Pretendard ExtraBold" pitchFamily="34" charset="0"/>
-                <a:ea typeface="Pretendard ExtraBold" pitchFamily="34" charset="-122"/>
+                <a:ea typeface="Pretendard ExtraBold" pitchFamily="34" charset="-127"/>
                 <a:cs typeface="Pretendard ExtraBold" pitchFamily="34" charset="-120"/>
               </a:rPr>
               <a:t>1,500</a:t>
@@ -7810,7 +7810,7 @@
                   <a:srgbClr val="1D3A2A"/>
                 </a:solidFill>
                 <a:latin typeface="Pretendard" pitchFamily="34" charset="0"/>
-                <a:ea typeface="Pretendard" pitchFamily="34" charset="-122"/>
+                <a:ea typeface="Pretendard" pitchFamily="34" charset="-127"/>
                 <a:cs typeface="Pretendard" pitchFamily="34" charset="-120"/>
               </a:rPr>
               <a:t>만 원</a:t>
@@ -7852,7 +7852,7 @@
                   <a:srgbClr val="1D3A2A"/>
                 </a:solidFill>
                 <a:latin typeface="Pretendard ExtraBold" pitchFamily="34" charset="0"/>
-                <a:ea typeface="Pretendard ExtraBold" pitchFamily="34" charset="-122"/>
+                <a:ea typeface="Pretendard ExtraBold" pitchFamily="34" charset="-127"/>
                 <a:cs typeface="Pretendard ExtraBold" pitchFamily="34" charset="-120"/>
               </a:rPr>
               <a:t>2,000</a:t>
@@ -7869,7 +7869,7 @@
                   <a:srgbClr val="1D3A2A"/>
                 </a:solidFill>
                 <a:latin typeface="Pretendard" pitchFamily="34" charset="0"/>
-                <a:ea typeface="Pretendard" pitchFamily="34" charset="-122"/>
+                <a:ea typeface="Pretendard" pitchFamily="34" charset="-127"/>
                 <a:cs typeface="Pretendard" pitchFamily="34" charset="-120"/>
               </a:rPr>
               <a:t>만 원</a:t>
@@ -7911,7 +7911,7 @@
                   <a:srgbClr val="2E7A4E"/>
                 </a:solidFill>
                 <a:latin typeface="Pretendard ExtraBold" pitchFamily="34" charset="0"/>
-                <a:ea typeface="Pretendard ExtraBold" pitchFamily="34" charset="-122"/>
+                <a:ea typeface="Pretendard ExtraBold" pitchFamily="34" charset="-127"/>
                 <a:cs typeface="Pretendard ExtraBold" pitchFamily="34" charset="-120"/>
               </a:rPr>
               <a:t>90%</a:t>
@@ -7953,7 +7953,7 @@
                   <a:srgbClr val="2E7A4E"/>
                 </a:solidFill>
                 <a:latin typeface="Pretendard ExtraBold" pitchFamily="34" charset="0"/>
-                <a:ea typeface="Pretendard ExtraBold" pitchFamily="34" charset="-122"/>
+                <a:ea typeface="Pretendard ExtraBold" pitchFamily="34" charset="-127"/>
                 <a:cs typeface="Pretendard ExtraBold" pitchFamily="34" charset="-120"/>
               </a:rPr>
               <a:t>80%</a:t>
@@ -7995,7 +7995,7 @@
                   <a:srgbClr val="2E7A4E"/>
                 </a:solidFill>
                 <a:latin typeface="Pretendard ExtraBold" pitchFamily="34" charset="0"/>
-                <a:ea typeface="Pretendard ExtraBold" pitchFamily="34" charset="-122"/>
+                <a:ea typeface="Pretendard ExtraBold" pitchFamily="34" charset="-127"/>
                 <a:cs typeface="Pretendard ExtraBold" pitchFamily="34" charset="-120"/>
               </a:rPr>
               <a:t>90% 이상</a:t>
@@ -8037,7 +8037,7 @@
                   <a:srgbClr val="4C574F"/>
                 </a:solidFill>
                 <a:latin typeface="Pretendard" pitchFamily="34" charset="0"/>
-                <a:ea typeface="Pretendard" pitchFamily="34" charset="-122"/>
+                <a:ea typeface="Pretendard" pitchFamily="34" charset="-127"/>
                 <a:cs typeface="Pretendard" pitchFamily="34" charset="-120"/>
               </a:rPr>
               <a:t>다시 맡긴 발주 기관</a:t>
@@ -8079,7 +8079,7 @@
                   <a:srgbClr val="4C574F"/>
                 </a:solidFill>
                 <a:latin typeface="Pretendard" pitchFamily="34" charset="0"/>
-                <a:ea typeface="Pretendard" pitchFamily="34" charset="-122"/>
+                <a:ea typeface="Pretendard" pitchFamily="34" charset="-127"/>
                 <a:cs typeface="Pretendard" pitchFamily="34" charset="-120"/>
               </a:rPr>
               <a:t>캐릭터와 대화 기술</a:t>
@@ -8121,7 +8121,7 @@
                   <a:srgbClr val="4C574F"/>
                 </a:solidFill>
                 <a:latin typeface="Pretendard" pitchFamily="34" charset="0"/>
-                <a:ea typeface="Pretendard" pitchFamily="34" charset="-122"/>
+                <a:ea typeface="Pretendard" pitchFamily="34" charset="-127"/>
                 <a:cs typeface="Pretendard" pitchFamily="34" charset="-120"/>
               </a:rPr>
               <a:t>중대규모, 19~30학급</a:t>
@@ -8163,7 +8163,7 @@
                   <a:srgbClr val="4C574F"/>
                 </a:solidFill>
                 <a:latin typeface="Pretendard" pitchFamily="34" charset="0"/>
-                <a:ea typeface="Pretendard" pitchFamily="34" charset="-122"/>
+                <a:ea typeface="Pretendard" pitchFamily="34" charset="-127"/>
                 <a:cs typeface="Pretendard" pitchFamily="34" charset="-120"/>
               </a:rPr>
               <a:t>대규모, 31학급 이상</a:t>
@@ -8205,7 +8205,7 @@
                   <a:srgbClr val="4C574F"/>
                 </a:solidFill>
                 <a:latin typeface="Pretendard" pitchFamily="34" charset="0"/>
-                <a:ea typeface="Pretendard" pitchFamily="34" charset="-122"/>
+                <a:ea typeface="Pretendard" pitchFamily="34" charset="-127"/>
                 <a:cs typeface="Pretendard" pitchFamily="34" charset="-120"/>
               </a:rPr>
               <a:t>독후활동과</a:t>
@@ -8225,7 +8225,7 @@
                   <a:srgbClr val="4C574F"/>
                 </a:solidFill>
                 <a:latin typeface="Pretendard" pitchFamily="34" charset="0"/>
-                <a:ea typeface="Pretendard" pitchFamily="34" charset="-122"/>
+                <a:ea typeface="Pretendard" pitchFamily="34" charset="-127"/>
                 <a:cs typeface="Pretendard" pitchFamily="34" charset="-120"/>
               </a:rPr>
               <a:t>인물 대화 참여</a:t>
@@ -8267,7 +8267,7 @@
                   <a:srgbClr val="4C574F"/>
                 </a:solidFill>
                 <a:latin typeface="Pretendard" pitchFamily="34" charset="0"/>
-                <a:ea typeface="Pretendard" pitchFamily="34" charset="-122"/>
+                <a:ea typeface="Pretendard" pitchFamily="34" charset="-127"/>
                 <a:cs typeface="Pretendard" pitchFamily="34" charset="-120"/>
               </a:rPr>
               <a:t>독서수업</a:t>
@@ -8287,7 +8287,7 @@
                   <a:srgbClr val="4C574F"/>
                 </a:solidFill>
                 <a:latin typeface="Pretendard" pitchFamily="34" charset="0"/>
-                <a:ea typeface="Pretendard" pitchFamily="34" charset="-122"/>
+                <a:ea typeface="Pretendard" pitchFamily="34" charset="-127"/>
                 <a:cs typeface="Pretendard" pitchFamily="34" charset="-120"/>
               </a:rPr>
               <a:t>운영 학급</a:t>
@@ -8329,7 +8329,7 @@
                   <a:srgbClr val="4C574F"/>
                 </a:solidFill>
                 <a:latin typeface="Pretendard" pitchFamily="34" charset="0"/>
-                <a:ea typeface="Pretendard" pitchFamily="34" charset="-122"/>
+                <a:ea typeface="Pretendard" pitchFamily="34" charset="-127"/>
                 <a:cs typeface="Pretendard" pitchFamily="34" charset="-120"/>
               </a:rPr>
               <a:t>학생, 교사</a:t>
@@ -8349,7 +8349,7 @@
                   <a:srgbClr val="4C574F"/>
                 </a:solidFill>
                 <a:latin typeface="Pretendard" pitchFamily="34" charset="0"/>
-                <a:ea typeface="Pretendard" pitchFamily="34" charset="-122"/>
+                <a:ea typeface="Pretendard" pitchFamily="34" charset="-127"/>
                 <a:cs typeface="Pretendard" pitchFamily="34" charset="-120"/>
               </a:rPr>
               <a:t>만족도</a:t>
@@ -8391,7 +8391,7 @@
                   <a:srgbClr val="1D3A2A"/>
                 </a:solidFill>
                 <a:latin typeface="Pretendard" pitchFamily="34" charset="0"/>
-                <a:ea typeface="Pretendard" pitchFamily="34" charset="-122"/>
+                <a:ea typeface="Pretendard" pitchFamily="34" charset="-127"/>
                 <a:cs typeface="Pretendard" pitchFamily="34" charset="-120"/>
               </a:rPr>
               <a:t>정보 보호</a:t>
@@ -8411,7 +8411,7 @@
                   <a:srgbClr val="4C574F"/>
                 </a:solidFill>
                 <a:latin typeface="Pretendard" pitchFamily="34" charset="0"/>
-                <a:ea typeface="Pretendard" pitchFamily="34" charset="-122"/>
+                <a:ea typeface="Pretendard" pitchFamily="34" charset="-127"/>
                 <a:cs typeface="Pretendard" pitchFamily="34" charset="-120"/>
               </a:rPr>
               <a:t>무보관(ZDR)을 적용해, AI로 보낸 글은 처리 뒤 남지 않고 AI 학습에도 쓰이지 않습니다.</a:t>
@@ -8453,7 +8453,7 @@
                   <a:srgbClr val="4C574F"/>
                 </a:solidFill>
                 <a:latin typeface="Pretendard" pitchFamily="34" charset="0"/>
-                <a:ea typeface="Pretendard" pitchFamily="34" charset="-122"/>
+                <a:ea typeface="Pretendard" pitchFamily="34" charset="-127"/>
                 <a:cs typeface="Pretendard" pitchFamily="34" charset="-120"/>
               </a:rPr>
               <a:t>보호자 동의를 확인해 학생 계정을 만들고, 통계는 이름 없는 합계로만 내려받습니다. 부기의 AI 기능은 OpenAI와 Anthropic(Claude) API로 운영합니다. 두 사업자 모두 데이터</a:t>
@@ -8495,7 +8495,7 @@
                   <a:srgbClr val="7B847D"/>
                 </a:solidFill>
                 <a:latin typeface="Pretendard" pitchFamily="34" charset="0"/>
-                <a:ea typeface="Pretendard" pitchFamily="34" charset="-122"/>
+                <a:ea typeface="Pretendard" pitchFamily="34" charset="-127"/>
                 <a:cs typeface="Pretendard" pitchFamily="34" charset="-120"/>
               </a:rPr>
               <a:t>출처: OECD PISA 2025 결과 보도(2026. 9.), 2022년 값은 교육부와 한국교육과정평가원(2023. 12.), 교원 인식은 한국교총(2024. 10.), 독서 긍정 인식은 문화체육관광부 「2023년 국민독서실태조사」, 정책은</a:t>
@@ -8515,7 +8515,7 @@
                   <a:srgbClr val="7B847D"/>
                 </a:solidFill>
                 <a:latin typeface="Pretendard" pitchFamily="34" charset="0"/>
-                <a:ea typeface="Pretendard" pitchFamily="34" charset="-122"/>
+                <a:ea typeface="Pretendard" pitchFamily="34" charset="-127"/>
                 <a:cs typeface="Pretendard" pitchFamily="34" charset="-120"/>
               </a:rPr>
               <a:t>교육부 「학교 독서교육 활성화 방안」(2026. 7. 2.). 운영 결과는 선도교사단 72학급 온오프라인 운영 결과 종합. 교사 의견은 홍보 사용에 동의한 후기 원문. 사업비와 성과 목표는 안이며 참여 학교 수와 학급 규모가 정해지면</a:t>
@@ -8557,7 +8557,7 @@
                   <a:srgbClr val="7B847D"/>
                 </a:solidFill>
                 <a:latin typeface="Pretendard" pitchFamily="34" charset="0"/>
-                <a:ea typeface="Pretendard" pitchFamily="34" charset="-122"/>
+                <a:ea typeface="Pretendard" pitchFamily="34" charset="-127"/>
                 <a:cs typeface="Pretendard" pitchFamily="34" charset="-120"/>
               </a:rPr>
               <a:t>교육청과 협의해 확정. 수행 실적은 2018~2026년 제안기관 집계(관계사 포함, 발주 기관 65곳 가운데 46곳)이며 실적증명서로 제출. 특허 「아바타 기반 도서 등장인물 대화형 독서활동」. 자세한 내용은 부기 위탁운영 제안서</a:t>
@@ -8577,10 +8577,10 @@
                   <a:srgbClr val="7B847D"/>
                 </a:solidFill>
                 <a:latin typeface="Pretendard" pitchFamily="34" charset="0"/>
-                <a:ea typeface="Pretendard" pitchFamily="34" charset="-122"/>
-                <a:cs typeface="Pretendard" pitchFamily="34" charset="-120"/>
-              </a:rPr>
-              <a:t>(47쪽).</a:t>
+                <a:ea typeface="Pretendard" pitchFamily="34" charset="-127"/>
+                <a:cs typeface="Pretendard" pitchFamily="34" charset="-120"/>
+              </a:rPr>
+              <a:t>(49쪽).</a:t>
             </a:r>
             <a:endParaRPr lang="en-US" sz="610" dirty="0"/>
           </a:p>
@@ -8619,7 +8619,7 @@
                   <a:srgbClr val="F2D58A"/>
                 </a:solidFill>
                 <a:latin typeface="Pretendard" pitchFamily="34" charset="0"/>
-                <a:ea typeface="Pretendard" pitchFamily="34" charset="-122"/>
+                <a:ea typeface="Pretendard" pitchFamily="34" charset="-127"/>
                 <a:cs typeface="Pretendard" pitchFamily="34" charset="-120"/>
               </a:rPr>
               <a:t>부기 누리집 </a:t>
@@ -8636,7 +8636,7 @@
                   <a:srgbClr val="FFFFFF"/>
                 </a:solidFill>
                 <a:latin typeface="Pretendard Black" pitchFamily="34" charset="0"/>
-                <a:ea typeface="Pretendard Black" pitchFamily="34" charset="-122"/>
+                <a:ea typeface="Pretendard Black" pitchFamily="34" charset="-127"/>
                 <a:cs typeface="Pretendard Black" pitchFamily="34" charset="-120"/>
               </a:rPr>
               <a:t>bookie.io.kr</a:t>
@@ -8678,7 +8678,7 @@
                   <a:srgbClr val="DFE8E1"/>
                 </a:solidFill>
                 <a:latin typeface="Pretendard" pitchFamily="34" charset="0"/>
-                <a:ea typeface="Pretendard" pitchFamily="34" charset="-122"/>
+                <a:ea typeface="Pretendard" pitchFamily="34" charset="-127"/>
                 <a:cs typeface="Pretendard" pitchFamily="34" charset="-120"/>
               </a:rPr>
               <a:t>주식회사 엠에스이씨엠(MSECM)</a:t>
@@ -8720,7 +8720,7 @@
                   <a:srgbClr val="DFE8E1"/>
                 </a:solidFill>
                 <a:latin typeface="Pretendard" pitchFamily="34" charset="0"/>
-                <a:ea typeface="Pretendard" pitchFamily="34" charset="-122"/>
+                <a:ea typeface="Pretendard" pitchFamily="34" charset="-127"/>
                 <a:cs typeface="Pretendard" pitchFamily="34" charset="-120"/>
               </a:rPr>
               <a:t>문의 이예진</a:t>
@@ -8762,7 +8762,7 @@
                   <a:srgbClr val="DFE8E1"/>
                 </a:solidFill>
                 <a:latin typeface="Pretendard" pitchFamily="34" charset="0"/>
-                <a:ea typeface="Pretendard" pitchFamily="34" charset="-122"/>
+                <a:ea typeface="Pretendard" pitchFamily="34" charset="-127"/>
                 <a:cs typeface="Pretendard" pitchFamily="34" charset="-120"/>
               </a:rPr>
               <a:t>T. 055-715-8854</a:t>
@@ -8804,7 +8804,7 @@
                   <a:srgbClr val="DFE8E1"/>
                 </a:solidFill>
                 <a:latin typeface="Pretendard" pitchFamily="34" charset="0"/>
-                <a:ea typeface="Pretendard" pitchFamily="34" charset="-122"/>
+                <a:ea typeface="Pretendard" pitchFamily="34" charset="-127"/>
                 <a:cs typeface="Pretendard" pitchFamily="34" charset="-120"/>
               </a:rPr>
               <a:t>E. yeajin@msecm.co.kr</a:t>
